--- a/Python/Lesson 05 - File IO/Python File IO.pptx
+++ b/Python/Lesson 05 - File IO/Python File IO.pptx
@@ -6,7 +6,7 @@
     <p:sldMasterId id="2147483694" r:id="rId2"/>
   </p:sldMasterIdLst>
   <p:notesMasterIdLst>
-    <p:notesMasterId r:id="rId30"/>
+    <p:notesMasterId r:id="rId31"/>
   </p:notesMasterIdLst>
   <p:sldIdLst>
     <p:sldId id="284" r:id="rId3"/>
@@ -21,21 +21,22 @@
     <p:sldId id="260" r:id="rId12"/>
     <p:sldId id="494" r:id="rId13"/>
     <p:sldId id="276" r:id="rId14"/>
-    <p:sldId id="278" r:id="rId15"/>
-    <p:sldId id="495" r:id="rId16"/>
-    <p:sldId id="498" r:id="rId17"/>
-    <p:sldId id="497" r:id="rId18"/>
-    <p:sldId id="496" r:id="rId19"/>
-    <p:sldId id="279" r:id="rId20"/>
-    <p:sldId id="280" r:id="rId21"/>
-    <p:sldId id="499" r:id="rId22"/>
-    <p:sldId id="261" r:id="rId23"/>
-    <p:sldId id="277" r:id="rId24"/>
-    <p:sldId id="281" r:id="rId25"/>
-    <p:sldId id="282" r:id="rId26"/>
-    <p:sldId id="283" r:id="rId27"/>
-    <p:sldId id="273" r:id="rId28"/>
-    <p:sldId id="259" r:id="rId29"/>
+    <p:sldId id="277" r:id="rId15"/>
+    <p:sldId id="281" r:id="rId16"/>
+    <p:sldId id="282" r:id="rId17"/>
+    <p:sldId id="283" r:id="rId18"/>
+    <p:sldId id="273" r:id="rId19"/>
+    <p:sldId id="278" r:id="rId20"/>
+    <p:sldId id="495" r:id="rId21"/>
+    <p:sldId id="498" r:id="rId22"/>
+    <p:sldId id="497" r:id="rId23"/>
+    <p:sldId id="496" r:id="rId24"/>
+    <p:sldId id="279" r:id="rId25"/>
+    <p:sldId id="261" r:id="rId26"/>
+    <p:sldId id="280" r:id="rId27"/>
+    <p:sldId id="499" r:id="rId28"/>
+    <p:sldId id="501" r:id="rId29"/>
+    <p:sldId id="259" r:id="rId30"/>
   </p:sldIdLst>
   <p:sldSz cx="12192000" cy="6858000"/>
   <p:notesSz cx="6858000" cy="9144000"/>
@@ -224,7 +225,7 @@
           <a:p>
             <a:fld id="{941F8BC1-DC94-491B-AA44-0232F744EE98}" type="datetimeFigureOut">
               <a:rPr lang="en-US" smtClean="0"/>
-              <a:t>6/22/2026</a:t>
+              <a:t>7/21/2026</a:t>
             </a:fld>
             <a:endParaRPr lang="en-US"/>
           </a:p>
@@ -601,7 +602,7 @@
               <a:buSzPts val="1100"/>
               <a:buNone/>
             </a:pPr>
-            <a:endParaRPr/>
+            <a:endParaRPr dirty="0"/>
           </a:p>
         </p:txBody>
       </p:sp>
@@ -895,7 +896,7 @@
           <a:p>
             <a:fld id="{2D8B709C-82E0-4ADF-BDA3-CCA1C8B22229}" type="slidenum">
               <a:rPr lang="en-US" smtClean="0"/>
-              <a:t>24</a:t>
+              <a:t>15</a:t>
             </a:fld>
             <a:endParaRPr lang="en-US"/>
           </a:p>
@@ -904,7 +905,7 @@
     </p:spTree>
     <p:extLst>
       <p:ext uri="{BB962C8B-B14F-4D97-AF65-F5344CB8AC3E}">
-        <p14:creationId xmlns:p14="http://schemas.microsoft.com/office/powerpoint/2010/main" val="2269376692"/>
+        <p14:creationId xmlns:p14="http://schemas.microsoft.com/office/powerpoint/2010/main" val="3252501931"/>
       </p:ext>
     </p:extLst>
   </p:cSld>
@@ -1847,7 +1848,7 @@
           <a:p>
             <a:fld id="{971AFA9C-17DA-4726-B9E3-ADECF7729AF7}" type="datetimeFigureOut">
               <a:rPr lang="en-US" smtClean="0"/>
-              <a:t>6/22/2026</a:t>
+              <a:t>7/21/2026</a:t>
             </a:fld>
             <a:endParaRPr lang="en-US"/>
           </a:p>
@@ -4467,7 +4468,7 @@
           <a:p>
             <a:fld id="{971AFA9C-17DA-4726-B9E3-ADECF7729AF7}" type="datetimeFigureOut">
               <a:rPr lang="en-US" smtClean="0"/>
-              <a:t>6/22/2026</a:t>
+              <a:t>7/21/2026</a:t>
             </a:fld>
             <a:endParaRPr lang="en-US"/>
           </a:p>
@@ -6211,7 +6212,7 @@
           <a:p>
             <a:fld id="{971AFA9C-17DA-4726-B9E3-ADECF7729AF7}" type="datetimeFigureOut">
               <a:rPr lang="en-US" smtClean="0"/>
-              <a:t>6/22/2026</a:t>
+              <a:t>7/21/2026</a:t>
             </a:fld>
             <a:endParaRPr lang="en-US"/>
           </a:p>
@@ -8055,7 +8056,7 @@
           <a:p>
             <a:fld id="{971AFA9C-17DA-4726-B9E3-ADECF7729AF7}" type="datetimeFigureOut">
               <a:rPr lang="en-US" smtClean="0"/>
-              <a:t>6/22/2026</a:t>
+              <a:t>7/21/2026</a:t>
             </a:fld>
             <a:endParaRPr lang="en-US"/>
           </a:p>
@@ -8260,7 +8261,7 @@
           <a:p>
             <a:fld id="{971AFA9C-17DA-4726-B9E3-ADECF7729AF7}" type="datetimeFigureOut">
               <a:rPr lang="en-US" smtClean="0"/>
-              <a:t>6/22/2026</a:t>
+              <a:t>7/21/2026</a:t>
             </a:fld>
             <a:endParaRPr lang="en-US"/>
           </a:p>
@@ -8508,7 +8509,7 @@
           <a:p>
             <a:fld id="{971AFA9C-17DA-4726-B9E3-ADECF7729AF7}" type="datetimeFigureOut">
               <a:rPr lang="en-US" smtClean="0"/>
-              <a:t>6/22/2026</a:t>
+              <a:t>7/21/2026</a:t>
             </a:fld>
             <a:endParaRPr lang="en-US"/>
           </a:p>
@@ -8825,7 +8826,7 @@
           <a:p>
             <a:fld id="{971AFA9C-17DA-4726-B9E3-ADECF7729AF7}" type="datetimeFigureOut">
               <a:rPr lang="en-US" smtClean="0"/>
-              <a:t>6/22/2026</a:t>
+              <a:t>7/21/2026</a:t>
             </a:fld>
             <a:endParaRPr lang="en-US"/>
           </a:p>
@@ -9478,7 +9479,7 @@
           <a:p>
             <a:fld id="{971AFA9C-17DA-4726-B9E3-ADECF7729AF7}" type="datetimeFigureOut">
               <a:rPr lang="en-US" smtClean="0"/>
-              <a:t>6/22/2026</a:t>
+              <a:t>7/21/2026</a:t>
             </a:fld>
             <a:endParaRPr lang="en-US"/>
           </a:p>
@@ -10388,7 +10389,7 @@
           <a:p>
             <a:fld id="{971AFA9C-17DA-4726-B9E3-ADECF7729AF7}" type="datetimeFigureOut">
               <a:rPr lang="en-US" smtClean="0"/>
-              <a:t>6/22/2026</a:t>
+              <a:t>7/21/2026</a:t>
             </a:fld>
             <a:endParaRPr lang="en-US"/>
           </a:p>
@@ -11550,7 +11551,7 @@
           <a:p>
             <a:fld id="{971AFA9C-17DA-4726-B9E3-ADECF7729AF7}" type="datetimeFigureOut">
               <a:rPr lang="en-US" smtClean="0"/>
-              <a:t>6/22/2026</a:t>
+              <a:t>7/21/2026</a:t>
             </a:fld>
             <a:endParaRPr lang="en-US"/>
           </a:p>
@@ -11860,7 +11861,7 @@
           <a:p>
             <a:fld id="{971AFA9C-17DA-4726-B9E3-ADECF7729AF7}" type="datetimeFigureOut">
               <a:rPr lang="en-US" smtClean="0"/>
-              <a:t>6/22/2026</a:t>
+              <a:t>7/21/2026</a:t>
             </a:fld>
             <a:endParaRPr lang="en-US"/>
           </a:p>
@@ -12132,7 +12133,7 @@
           <a:p>
             <a:fld id="{971AFA9C-17DA-4726-B9E3-ADECF7729AF7}" type="datetimeFigureOut">
               <a:rPr lang="en-US" smtClean="0"/>
-              <a:t>6/22/2026</a:t>
+              <a:t>7/21/2026</a:t>
             </a:fld>
             <a:endParaRPr lang="en-US"/>
           </a:p>
@@ -13947,7 +13948,7 @@
           <a:p>
             <a:fld id="{971AFA9C-17DA-4726-B9E3-ADECF7729AF7}" type="datetimeFigureOut">
               <a:rPr lang="en-US" smtClean="0"/>
-              <a:t>6/22/2026</a:t>
+              <a:t>7/21/2026</a:t>
             </a:fld>
             <a:endParaRPr lang="en-US"/>
           </a:p>
@@ -14281,7 +14282,7 @@
           <a:p>
             <a:fld id="{971AFA9C-17DA-4726-B9E3-ADECF7729AF7}" type="datetimeFigureOut">
               <a:rPr lang="en-US" smtClean="0"/>
-              <a:t>6/22/2026</a:t>
+              <a:t>7/21/2026</a:t>
             </a:fld>
             <a:endParaRPr lang="en-US"/>
           </a:p>
@@ -14581,7 +14582,7 @@
           <a:p>
             <a:fld id="{971AFA9C-17DA-4726-B9E3-ADECF7729AF7}" type="datetimeFigureOut">
               <a:rPr lang="en-US" smtClean="0"/>
-              <a:t>6/22/2026</a:t>
+              <a:t>7/21/2026</a:t>
             </a:fld>
             <a:endParaRPr lang="en-US"/>
           </a:p>
@@ -14881,7 +14882,7 @@
           <a:p>
             <a:fld id="{971AFA9C-17DA-4726-B9E3-ADECF7729AF7}" type="datetimeFigureOut">
               <a:rPr lang="en-US" smtClean="0"/>
-              <a:t>6/22/2026</a:t>
+              <a:t>7/21/2026</a:t>
             </a:fld>
             <a:endParaRPr lang="en-US"/>
           </a:p>
@@ -15423,7 +15424,7 @@
           <a:p>
             <a:fld id="{971AFA9C-17DA-4726-B9E3-ADECF7729AF7}" type="datetimeFigureOut">
               <a:rPr lang="en-US" smtClean="0"/>
-              <a:t>6/22/2026</a:t>
+              <a:t>7/21/2026</a:t>
             </a:fld>
             <a:endParaRPr lang="en-US"/>
           </a:p>
@@ -15573,7 +15574,7 @@
           <a:p>
             <a:fld id="{971AFA9C-17DA-4726-B9E3-ADECF7729AF7}" type="datetimeFigureOut">
               <a:rPr lang="en-US" smtClean="0"/>
-              <a:t>6/22/2026</a:t>
+              <a:t>7/21/2026</a:t>
             </a:fld>
             <a:endParaRPr lang="en-US"/>
           </a:p>
@@ -15731,7 +15732,7 @@
           <a:p>
             <a:fld id="{971AFA9C-17DA-4726-B9E3-ADECF7729AF7}" type="datetimeFigureOut">
               <a:rPr lang="en-US" smtClean="0"/>
-              <a:t>6/22/2026</a:t>
+              <a:t>7/21/2026</a:t>
             </a:fld>
             <a:endParaRPr lang="en-US"/>
           </a:p>
@@ -15998,7 +15999,7 @@
           <a:p>
             <a:fld id="{971AFA9C-17DA-4726-B9E3-ADECF7729AF7}" type="datetimeFigureOut">
               <a:rPr lang="en-US" smtClean="0"/>
-              <a:t>6/22/2026</a:t>
+              <a:t>7/21/2026</a:t>
             </a:fld>
             <a:endParaRPr lang="en-US"/>
           </a:p>
@@ -16126,7 +16127,7 @@
           <a:p>
             <a:fld id="{971AFA9C-17DA-4726-B9E3-ADECF7729AF7}" type="datetimeFigureOut">
               <a:rPr lang="en-US" smtClean="0"/>
-              <a:t>6/22/2026</a:t>
+              <a:t>7/21/2026</a:t>
             </a:fld>
             <a:endParaRPr lang="en-US"/>
           </a:p>
@@ -16561,7 +16562,7 @@
           <a:p>
             <a:fld id="{971AFA9C-17DA-4726-B9E3-ADECF7729AF7}" type="datetimeFigureOut">
               <a:rPr lang="en-US" smtClean="0"/>
-              <a:t>6/22/2026</a:t>
+              <a:t>7/21/2026</a:t>
             </a:fld>
             <a:endParaRPr lang="en-US"/>
           </a:p>
@@ -16708,7 +16709,7 @@
           <a:p>
             <a:fld id="{971AFA9C-17DA-4726-B9E3-ADECF7729AF7}" type="datetimeFigureOut">
               <a:rPr lang="en-US" smtClean="0"/>
-              <a:t>6/22/2026</a:t>
+              <a:t>7/21/2026</a:t>
             </a:fld>
             <a:endParaRPr lang="en-US"/>
           </a:p>
@@ -18638,7 +18639,7 @@
           <a:p>
             <a:fld id="{971AFA9C-17DA-4726-B9E3-ADECF7729AF7}" type="datetimeFigureOut">
               <a:rPr lang="en-US" smtClean="0"/>
-              <a:t>6/22/2026</a:t>
+              <a:t>7/21/2026</a:t>
             </a:fld>
             <a:endParaRPr lang="en-US"/>
           </a:p>
@@ -18974,7 +18975,7 @@
           <a:p>
             <a:fld id="{971AFA9C-17DA-4726-B9E3-ADECF7729AF7}" type="datetimeFigureOut">
               <a:rPr lang="en-US" smtClean="0"/>
-              <a:t>6/22/2026</a:t>
+              <a:t>7/21/2026</a:t>
             </a:fld>
             <a:endParaRPr lang="en-US"/>
           </a:p>
@@ -19269,7 +19270,7 @@
           <a:p>
             <a:fld id="{971AFA9C-17DA-4726-B9E3-ADECF7729AF7}" type="datetimeFigureOut">
               <a:rPr lang="en-US" smtClean="0"/>
-              <a:t>6/22/2026</a:t>
+              <a:t>7/21/2026</a:t>
             </a:fld>
             <a:endParaRPr lang="en-US"/>
           </a:p>
@@ -19398,7 +19399,7 @@
           <a:p>
             <a:fld id="{971AFA9C-17DA-4726-B9E3-ADECF7729AF7}" type="datetimeFigureOut">
               <a:rPr lang="en-US" smtClean="0"/>
-              <a:t>6/22/2026</a:t>
+              <a:t>7/21/2026</a:t>
             </a:fld>
             <a:endParaRPr lang="en-US"/>
           </a:p>
@@ -21193,7 +21194,7 @@
           <a:p>
             <a:fld id="{971AFA9C-17DA-4726-B9E3-ADECF7729AF7}" type="datetimeFigureOut">
               <a:rPr lang="en-US" smtClean="0"/>
-              <a:t>6/22/2026</a:t>
+              <a:t>7/21/2026</a:t>
             </a:fld>
             <a:endParaRPr lang="en-US"/>
           </a:p>
@@ -22759,7 +22760,7 @@
           <a:p>
             <a:fld id="{971AFA9C-17DA-4726-B9E3-ADECF7729AF7}" type="datetimeFigureOut">
               <a:rPr lang="en-US" smtClean="0"/>
-              <a:t>6/22/2026</a:t>
+              <a:t>7/21/2026</a:t>
             </a:fld>
             <a:endParaRPr lang="en-US"/>
           </a:p>
@@ -24566,7 +24567,7 @@
           <a:p>
             <a:fld id="{971AFA9C-17DA-4726-B9E3-ADECF7729AF7}" type="datetimeFigureOut">
               <a:rPr lang="en-US" smtClean="0"/>
-              <a:t>6/22/2026</a:t>
+              <a:t>7/21/2026</a:t>
             </a:fld>
             <a:endParaRPr lang="en-US"/>
           </a:p>
@@ -24815,7 +24816,7 @@
           <a:p>
             <a:fld id="{971AFA9C-17DA-4726-B9E3-ADECF7729AF7}" type="datetimeFigureOut">
               <a:rPr lang="en-US" smtClean="0"/>
-              <a:t>6/22/2026</a:t>
+              <a:t>7/21/2026</a:t>
             </a:fld>
             <a:endParaRPr lang="en-US"/>
           </a:p>
@@ -25121,7 +25122,7 @@
           <a:p>
             <a:fld id="{971AFA9C-17DA-4726-B9E3-ADECF7729AF7}" type="datetimeFigureOut">
               <a:rPr lang="en-US" smtClean="0"/>
-              <a:t>6/22/2026</a:t>
+              <a:t>7/21/2026</a:t>
             </a:fld>
             <a:endParaRPr lang="en-US"/>
           </a:p>
@@ -25322,7 +25323,7 @@
           <a:p>
             <a:fld id="{971AFA9C-17DA-4726-B9E3-ADECF7729AF7}" type="datetimeFigureOut">
               <a:rPr lang="en-US" smtClean="0"/>
-              <a:t>6/22/2026</a:t>
+              <a:t>7/21/2026</a:t>
             </a:fld>
             <a:endParaRPr lang="en-US"/>
           </a:p>
@@ -25810,7 +25811,7 @@
           <a:p>
             <a:fld id="{971AFA9C-17DA-4726-B9E3-ADECF7729AF7}" type="datetimeFigureOut">
               <a:rPr lang="en-US" smtClean="0"/>
-              <a:t>6/22/2026</a:t>
+              <a:t>7/21/2026</a:t>
             </a:fld>
             <a:endParaRPr lang="en-US"/>
           </a:p>
@@ -26446,7 +26447,7 @@
           <a:p>
             <a:fld id="{971AFA9C-17DA-4726-B9E3-ADECF7729AF7}" type="datetimeFigureOut">
               <a:rPr lang="en-US" smtClean="0"/>
-              <a:t>6/22/2026</a:t>
+              <a:t>7/21/2026</a:t>
             </a:fld>
             <a:endParaRPr lang="en-US"/>
           </a:p>
@@ -27503,7 +27504,7 @@
           <a:p>
             <a:fld id="{971AFA9C-17DA-4726-B9E3-ADECF7729AF7}" type="datetimeFigureOut">
               <a:rPr lang="en-US" smtClean="0"/>
-              <a:t>6/22/2026</a:t>
+              <a:t>7/21/2026</a:t>
             </a:fld>
             <a:endParaRPr lang="en-US"/>
           </a:p>
@@ -28539,7 +28540,7 @@
           <a:p>
             <a:fld id="{971AFA9C-17DA-4726-B9E3-ADECF7729AF7}" type="datetimeFigureOut">
               <a:rPr lang="en-US" smtClean="0"/>
-              <a:t>6/22/2026</a:t>
+              <a:t>7/21/2026</a:t>
             </a:fld>
             <a:endParaRPr lang="en-US"/>
           </a:p>
@@ -30235,7 +30236,7 @@
           <a:p>
             <a:fld id="{971AFA9C-17DA-4726-B9E3-ADECF7729AF7}" type="datetimeFigureOut">
               <a:rPr lang="en-US" smtClean="0"/>
-              <a:t>6/22/2026</a:t>
+              <a:t>7/21/2026</a:t>
             </a:fld>
             <a:endParaRPr lang="en-US"/>
           </a:p>
@@ -32038,7 +32039,7 @@
           <a:p>
             <a:fld id="{971AFA9C-17DA-4726-B9E3-ADECF7729AF7}" type="datetimeFigureOut">
               <a:rPr lang="en-US" smtClean="0"/>
-              <a:t>6/22/2026</a:t>
+              <a:t>7/21/2026</a:t>
             </a:fld>
             <a:endParaRPr lang="en-US"/>
           </a:p>
@@ -32216,7 +32217,7 @@
           <a:p>
             <a:fld id="{971AFA9C-17DA-4726-B9E3-ADECF7729AF7}" type="datetimeFigureOut">
               <a:rPr lang="en-US" smtClean="0"/>
-              <a:t>6/22/2026</a:t>
+              <a:t>7/21/2026</a:t>
             </a:fld>
             <a:endParaRPr lang="en-US"/>
           </a:p>
@@ -32442,7 +32443,7 @@
           <a:p>
             <a:fld id="{971AFA9C-17DA-4726-B9E3-ADECF7729AF7}" type="datetimeFigureOut">
               <a:rPr lang="en-US" smtClean="0"/>
-              <a:t>6/22/2026</a:t>
+              <a:t>7/21/2026</a:t>
             </a:fld>
             <a:endParaRPr lang="en-US"/>
           </a:p>
@@ -32731,7 +32732,7 @@
           <a:p>
             <a:fld id="{971AFA9C-17DA-4726-B9E3-ADECF7729AF7}" type="datetimeFigureOut">
               <a:rPr lang="en-US" smtClean="0"/>
-              <a:t>6/22/2026</a:t>
+              <a:t>7/21/2026</a:t>
             </a:fld>
             <a:endParaRPr lang="en-US"/>
           </a:p>
@@ -33342,7 +33343,7 @@
           <a:p>
             <a:fld id="{971AFA9C-17DA-4726-B9E3-ADECF7729AF7}" type="datetimeFigureOut">
               <a:rPr lang="en-US" smtClean="0"/>
-              <a:t>6/22/2026</a:t>
+              <a:t>7/21/2026</a:t>
             </a:fld>
             <a:endParaRPr lang="en-US"/>
           </a:p>
@@ -33618,7 +33619,7 @@
           <a:p>
             <a:fld id="{971AFA9C-17DA-4726-B9E3-ADECF7729AF7}" type="datetimeFigureOut">
               <a:rPr lang="en-US" smtClean="0"/>
-              <a:t>6/22/2026</a:t>
+              <a:t>7/21/2026</a:t>
             </a:fld>
             <a:endParaRPr lang="en-US"/>
           </a:p>
@@ -34475,7 +34476,7 @@
           <a:p>
             <a:fld id="{971AFA9C-17DA-4726-B9E3-ADECF7729AF7}" type="datetimeFigureOut">
               <a:rPr lang="en-US" smtClean="0"/>
-              <a:t>6/22/2026</a:t>
+              <a:t>7/21/2026</a:t>
             </a:fld>
             <a:endParaRPr lang="en-US"/>
           </a:p>
@@ -35577,7 +35578,7 @@
           <a:p>
             <a:fld id="{971AFA9C-17DA-4726-B9E3-ADECF7729AF7}" type="datetimeFigureOut">
               <a:rPr lang="en-US" smtClean="0"/>
-              <a:t>6/22/2026</a:t>
+              <a:t>7/21/2026</a:t>
             </a:fld>
             <a:endParaRPr lang="en-US"/>
           </a:p>
@@ -35865,7 +35866,7 @@
           <a:p>
             <a:fld id="{971AFA9C-17DA-4726-B9E3-ADECF7729AF7}" type="datetimeFigureOut">
               <a:rPr lang="en-US" smtClean="0"/>
-              <a:t>6/22/2026</a:t>
+              <a:t>7/21/2026</a:t>
             </a:fld>
             <a:endParaRPr lang="en-US"/>
           </a:p>
@@ -36338,7 +36339,7 @@
           <a:p>
             <a:fld id="{971AFA9C-17DA-4726-B9E3-ADECF7729AF7}" type="datetimeFigureOut">
               <a:rPr lang="en-US" smtClean="0"/>
-              <a:t>6/22/2026</a:t>
+              <a:t>7/21/2026</a:t>
             </a:fld>
             <a:endParaRPr lang="en-US"/>
           </a:p>
@@ -36650,7 +36651,7 @@
           <a:p>
             <a:fld id="{971AFA9C-17DA-4726-B9E3-ADECF7729AF7}" type="datetimeFigureOut">
               <a:rPr lang="en-US" smtClean="0"/>
-              <a:t>6/22/2026</a:t>
+              <a:t>7/21/2026</a:t>
             </a:fld>
             <a:endParaRPr lang="en-US"/>
           </a:p>
@@ -36928,7 +36929,7 @@
           <a:p>
             <a:fld id="{971AFA9C-17DA-4726-B9E3-ADECF7729AF7}" type="datetimeFigureOut">
               <a:rPr lang="en-US" smtClean="0"/>
-              <a:t>6/22/2026</a:t>
+              <a:t>7/21/2026</a:t>
             </a:fld>
             <a:endParaRPr lang="en-US"/>
           </a:p>
@@ -37206,7 +37207,7 @@
           <a:p>
             <a:fld id="{971AFA9C-17DA-4726-B9E3-ADECF7729AF7}" type="datetimeFigureOut">
               <a:rPr lang="en-US" smtClean="0"/>
-              <a:t>6/22/2026</a:t>
+              <a:t>7/21/2026</a:t>
             </a:fld>
             <a:endParaRPr lang="en-US"/>
           </a:p>
@@ -41560,7 +41561,7 @@
           <a:p>
             <a:fld id="{971AFA9C-17DA-4726-B9E3-ADECF7729AF7}" type="datetimeFigureOut">
               <a:rPr lang="en-US" smtClean="0"/>
-              <a:t>6/22/2026</a:t>
+              <a:t>7/21/2026</a:t>
             </a:fld>
             <a:endParaRPr lang="en-US"/>
           </a:p>
@@ -42076,7 +42077,7 @@
           <a:p>
             <a:fld id="{971AFA9C-17DA-4726-B9E3-ADECF7729AF7}" type="datetimeFigureOut">
               <a:rPr lang="en-US" smtClean="0"/>
-              <a:t>6/22/2026</a:t>
+              <a:t>7/21/2026</a:t>
             </a:fld>
             <a:endParaRPr lang="en-US"/>
           </a:p>
@@ -42760,7 +42761,7 @@
           <a:p>
             <a:fld id="{971AFA9C-17DA-4726-B9E3-ADECF7729AF7}" type="datetimeFigureOut">
               <a:rPr lang="en-US" smtClean="0"/>
-              <a:t>6/22/2026</a:t>
+              <a:t>7/21/2026</a:t>
             </a:fld>
             <a:endParaRPr lang="en-US"/>
           </a:p>
@@ -43853,7 +43854,7 @@
           <a:p>
             <a:fld id="{971AFA9C-17DA-4726-B9E3-ADECF7729AF7}" type="datetimeFigureOut">
               <a:rPr lang="en-US" smtClean="0"/>
-              <a:t>6/22/2026</a:t>
+              <a:t>7/21/2026</a:t>
             </a:fld>
             <a:endParaRPr lang="en-US"/>
           </a:p>
@@ -44799,7 +44800,7 @@
           <a:p>
             <a:fld id="{971AFA9C-17DA-4726-B9E3-ADECF7729AF7}" type="datetimeFigureOut">
               <a:rPr lang="en-US" smtClean="0"/>
-              <a:t>6/22/2026</a:t>
+              <a:t>7/21/2026</a:t>
             </a:fld>
             <a:endParaRPr lang="en-US"/>
           </a:p>
@@ -46791,23 +46792,7 @@
             </a:pPr>
             <a:r>
               <a:rPr lang="en-US" dirty="0"/>
-              <a:t>Utilize the </a:t>
-            </a:r>
-            <a:r>
-              <a:rPr lang="en-US" dirty="0" err="1"/>
-              <a:t>os</a:t>
-            </a:r>
-            <a:r>
-              <a:rPr lang="en-US" dirty="0"/>
-              <a:t> and </a:t>
-            </a:r>
-            <a:r>
-              <a:rPr lang="en-US" dirty="0" err="1"/>
-              <a:t>pathlib.Path</a:t>
-            </a:r>
-            <a:r>
-              <a:rPr lang="en-US" dirty="0"/>
-              <a:t> modules to navigate a filesystem</a:t>
+              <a:t>Utilize standard python functions to manipulate files</a:t>
             </a:r>
           </a:p>
           <a:p>
@@ -46815,9 +46800,32 @@
               <a:buFont typeface="Arial" panose="020B0604020202020204" pitchFamily="34" charset="0"/>
               <a:buChar char="•"/>
             </a:pPr>
+            <a:endParaRPr lang="en-US" dirty="0"/>
+          </a:p>
+          <a:p>
+            <a:pPr marL="457200" indent="-457200">
+              <a:buFont typeface="Arial" panose="020B0604020202020204" pitchFamily="34" charset="0"/>
+              <a:buChar char="•"/>
+            </a:pPr>
             <a:r>
               <a:rPr lang="en-US" dirty="0"/>
-              <a:t>Utilize standard python functions to manipulate files</a:t>
+              <a:t>Utilize the </a:t>
+            </a:r>
+            <a:r>
+              <a:rPr lang="en-US" dirty="0" err="1"/>
+              <a:t>os</a:t>
+            </a:r>
+            <a:r>
+              <a:rPr lang="en-US" dirty="0"/>
+              <a:t> and </a:t>
+            </a:r>
+            <a:r>
+              <a:rPr lang="en-US" dirty="0" err="1"/>
+              <a:t>pathlib.Path</a:t>
+            </a:r>
+            <a:r>
+              <a:rPr lang="en-US" dirty="0"/>
+              <a:t> modules to navigate a filesystem</a:t>
             </a:r>
           </a:p>
         </p:txBody>
@@ -46854,6 +46862,1202 @@
       </p:grpSpPr>
       <p:sp>
         <p:nvSpPr>
+          <p:cNvPr id="2" name="Title 1">
+            <a:extLst>
+              <a:ext uri="{FF2B5EF4-FFF2-40B4-BE49-F238E27FC236}">
+                <a16:creationId xmlns:a16="http://schemas.microsoft.com/office/drawing/2014/main" id="{3469CDD8-6080-6002-43DF-A45AE5E3FD8C}"/>
+              </a:ext>
+            </a:extLst>
+          </p:cNvPr>
+          <p:cNvSpPr>
+            <a:spLocks noGrp="1"/>
+          </p:cNvSpPr>
+          <p:nvPr>
+            <p:ph type="title"/>
+          </p:nvPr>
+        </p:nvSpPr>
+        <p:spPr/>
+        <p:txBody>
+          <a:bodyPr/>
+          <a:lstStyle/>
+          <a:p>
+            <a:r>
+              <a:rPr lang="en-US" dirty="0"/>
+              <a:t>Manipulating files</a:t>
+            </a:r>
+          </a:p>
+        </p:txBody>
+      </p:sp>
+      <p:pic>
+        <p:nvPicPr>
+          <p:cNvPr id="6" name="Content Placeholder 5">
+            <a:extLst>
+              <a:ext uri="{FF2B5EF4-FFF2-40B4-BE49-F238E27FC236}">
+                <a16:creationId xmlns:a16="http://schemas.microsoft.com/office/drawing/2014/main" id="{242163BC-A88E-CDCA-639D-5B3C8DC3E870}"/>
+              </a:ext>
+            </a:extLst>
+          </p:cNvPr>
+          <p:cNvPicPr>
+            <a:picLocks noGrp="1" noChangeAspect="1"/>
+          </p:cNvPicPr>
+          <p:nvPr>
+            <p:ph idx="4294967295"/>
+          </p:nvPr>
+        </p:nvPicPr>
+        <p:blipFill>
+          <a:blip r:embed="rId2"/>
+          <a:stretch>
+            <a:fillRect/>
+          </a:stretch>
+        </p:blipFill>
+        <p:spPr>
+          <a:xfrm>
+            <a:off x="635267" y="1005999"/>
+            <a:ext cx="7466275" cy="5058481"/>
+          </a:xfrm>
+        </p:spPr>
+      </p:pic>
+    </p:spTree>
+    <p:extLst>
+      <p:ext uri="{BB962C8B-B14F-4D97-AF65-F5344CB8AC3E}">
+        <p14:creationId xmlns:p14="http://schemas.microsoft.com/office/powerpoint/2010/main" val="1338940151"/>
+      </p:ext>
+    </p:extLst>
+  </p:cSld>
+  <p:clrMapOvr>
+    <a:masterClrMapping/>
+  </p:clrMapOvr>
+</p:sld>
+</file>
+
+<file path=ppt/slides/slide14.xml><?xml version="1.0" encoding="utf-8"?>
+<p:sld xmlns:a="http://schemas.openxmlformats.org/drawingml/2006/main" xmlns:r="http://schemas.openxmlformats.org/officeDocument/2006/relationships" xmlns:p="http://schemas.openxmlformats.org/presentationml/2006/main">
+  <p:cSld>
+    <p:spTree>
+      <p:nvGrpSpPr>
+        <p:cNvPr id="1" name=""/>
+        <p:cNvGrpSpPr/>
+        <p:nvPr/>
+      </p:nvGrpSpPr>
+      <p:grpSpPr>
+        <a:xfrm>
+          <a:off x="0" y="0"/>
+          <a:ext cx="0" cy="0"/>
+          <a:chOff x="0" y="0"/>
+          <a:chExt cx="0" cy="0"/>
+        </a:xfrm>
+      </p:grpSpPr>
+      <p:sp>
+        <p:nvSpPr>
+          <p:cNvPr id="5" name="Title 4">
+            <a:extLst>
+              <a:ext uri="{FF2B5EF4-FFF2-40B4-BE49-F238E27FC236}">
+                <a16:creationId xmlns:a16="http://schemas.microsoft.com/office/drawing/2014/main" id="{9E909A96-B147-C0B7-6931-24BF30567220}"/>
+              </a:ext>
+            </a:extLst>
+          </p:cNvPr>
+          <p:cNvSpPr>
+            <a:spLocks noGrp="1"/>
+          </p:cNvSpPr>
+          <p:nvPr>
+            <p:ph type="title"/>
+          </p:nvPr>
+        </p:nvSpPr>
+        <p:spPr/>
+        <p:txBody>
+          <a:bodyPr/>
+          <a:lstStyle/>
+          <a:p>
+            <a:r>
+              <a:rPr lang="en-US" dirty="0"/>
+              <a:t>Common Actions</a:t>
+            </a:r>
+          </a:p>
+        </p:txBody>
+      </p:sp>
+      <p:graphicFrame>
+        <p:nvGraphicFramePr>
+          <p:cNvPr id="7" name="Content Placeholder 6">
+            <a:extLst>
+              <a:ext uri="{FF2B5EF4-FFF2-40B4-BE49-F238E27FC236}">
+                <a16:creationId xmlns:a16="http://schemas.microsoft.com/office/drawing/2014/main" id="{1388E7BE-1112-2D62-6248-B7586DC811DD}"/>
+              </a:ext>
+            </a:extLst>
+          </p:cNvPr>
+          <p:cNvGraphicFramePr>
+            <a:graphicFrameLocks noGrp="1"/>
+          </p:cNvGraphicFramePr>
+          <p:nvPr>
+            <p:ph idx="4294967295"/>
+          </p:nvPr>
+        </p:nvGraphicFramePr>
+        <p:xfrm>
+          <a:off x="548640" y="1529317"/>
+          <a:ext cx="10096901" cy="3667503"/>
+        </p:xfrm>
+        <a:graphic>
+          <a:graphicData uri="http://schemas.openxmlformats.org/drawingml/2006/table">
+            <a:tbl>
+              <a:tblPr/>
+              <a:tblGrid>
+                <a:gridCol w="5351646">
+                  <a:extLst>
+                    <a:ext uri="{9D8B030D-6E8A-4147-A177-3AD203B41FA5}">
+                      <a16:colId xmlns:a16="http://schemas.microsoft.com/office/drawing/2014/main" val="3937651176"/>
+                    </a:ext>
+                  </a:extLst>
+                </a:gridCol>
+                <a:gridCol w="4745255">
+                  <a:extLst>
+                    <a:ext uri="{9D8B030D-6E8A-4147-A177-3AD203B41FA5}">
+                      <a16:colId xmlns:a16="http://schemas.microsoft.com/office/drawing/2014/main" val="2019659395"/>
+                    </a:ext>
+                  </a:extLst>
+                </a:gridCol>
+              </a:tblGrid>
+              <a:tr h="334718">
+                <a:tc>
+                  <a:txBody>
+                    <a:bodyPr/>
+                    <a:lstStyle/>
+                    <a:p>
+                      <a:pPr>
+                        <a:buNone/>
+                      </a:pPr>
+                      <a:r>
+                        <a:rPr lang="en-US" sz="1600" b="1" dirty="0"/>
+                        <a:t>Operation</a:t>
+                      </a:r>
+                    </a:p>
+                  </a:txBody>
+                  <a:tcPr marL="54069" marR="54069" marT="41840" marB="41840" anchor="ctr">
+                    <a:lnL>
+                      <a:noFill/>
+                    </a:lnL>
+                    <a:lnR>
+                      <a:noFill/>
+                    </a:lnR>
+                    <a:lnT>
+                      <a:noFill/>
+                    </a:lnT>
+                    <a:lnB>
+                      <a:noFill/>
+                    </a:lnB>
+                    <a:noFill/>
+                  </a:tcPr>
+                </a:tc>
+                <a:tc>
+                  <a:txBody>
+                    <a:bodyPr/>
+                    <a:lstStyle/>
+                    <a:p>
+                      <a:pPr>
+                        <a:buNone/>
+                      </a:pPr>
+                      <a:r>
+                        <a:rPr lang="en-US" sz="1600" b="1" dirty="0"/>
+                        <a:t>Description</a:t>
+                      </a:r>
+                    </a:p>
+                  </a:txBody>
+                  <a:tcPr marL="54069" marR="54069" marT="41840" marB="41840" anchor="ctr">
+                    <a:lnL>
+                      <a:noFill/>
+                    </a:lnL>
+                    <a:lnR>
+                      <a:noFill/>
+                    </a:lnR>
+                    <a:lnT>
+                      <a:noFill/>
+                    </a:lnT>
+                    <a:lnB>
+                      <a:noFill/>
+                    </a:lnB>
+                    <a:noFill/>
+                  </a:tcPr>
+                </a:tc>
+                <a:extLst>
+                  <a:ext uri="{0D108BD9-81ED-4DB2-BD59-A6C34878D82A}">
+                    <a16:rowId xmlns:a16="http://schemas.microsoft.com/office/drawing/2014/main" val="2888546582"/>
+                  </a:ext>
+                </a:extLst>
+              </a:tr>
+              <a:tr h="585757">
+                <a:tc>
+                  <a:txBody>
+                    <a:bodyPr/>
+                    <a:lstStyle/>
+                    <a:p>
+                      <a:pPr>
+                        <a:buNone/>
+                      </a:pPr>
+                      <a:r>
+                        <a:rPr lang="en-US" sz="1600" dirty="0">
+                          <a:solidFill>
+                            <a:schemeClr val="tx2"/>
+                          </a:solidFill>
+                          <a:latin typeface="Consolas" panose="020B0609020204030204" pitchFamily="49" charset="0"/>
+                          <a:cs typeface="Courier New" panose="02070309020205020404" pitchFamily="49" charset="0"/>
+                        </a:rPr>
+                        <a:t>with open('file.txt', 'r') as f:</a:t>
+                      </a:r>
+                      <a:br>
+                        <a:rPr lang="en-US" sz="1600" dirty="0">
+                          <a:solidFill>
+                            <a:schemeClr val="tx2"/>
+                          </a:solidFill>
+                          <a:latin typeface="Consolas" panose="020B0609020204030204" pitchFamily="49" charset="0"/>
+                          <a:cs typeface="Courier New" panose="02070309020205020404" pitchFamily="49" charset="0"/>
+                        </a:rPr>
+                      </a:br>
+                      <a:r>
+                        <a:rPr lang="en-US" sz="1600" dirty="0">
+                          <a:solidFill>
+                            <a:schemeClr val="tx2"/>
+                          </a:solidFill>
+                          <a:latin typeface="Consolas" panose="020B0609020204030204" pitchFamily="49" charset="0"/>
+                          <a:cs typeface="Courier New" panose="02070309020205020404" pitchFamily="49" charset="0"/>
+                        </a:rPr>
+                        <a:t>  pass</a:t>
+                      </a:r>
+                    </a:p>
+                  </a:txBody>
+                  <a:tcPr marL="54069" marR="54069" marT="41840" marB="41840" anchor="ctr">
+                    <a:lnL>
+                      <a:noFill/>
+                    </a:lnL>
+                    <a:lnR>
+                      <a:noFill/>
+                    </a:lnR>
+                    <a:lnT>
+                      <a:noFill/>
+                    </a:lnT>
+                    <a:lnB>
+                      <a:noFill/>
+                    </a:lnB>
+                    <a:noFill/>
+                  </a:tcPr>
+                </a:tc>
+                <a:tc>
+                  <a:txBody>
+                    <a:bodyPr/>
+                    <a:lstStyle/>
+                    <a:p>
+                      <a:pPr>
+                        <a:buNone/>
+                      </a:pPr>
+                      <a:r>
+                        <a:rPr lang="en-US" sz="1600" dirty="0"/>
+                        <a:t>Prepare a file for reading</a:t>
+                      </a:r>
+                    </a:p>
+                  </a:txBody>
+                  <a:tcPr marL="54069" marR="54069" marT="41840" marB="41840" anchor="ctr">
+                    <a:lnL>
+                      <a:noFill/>
+                    </a:lnL>
+                    <a:lnR>
+                      <a:noFill/>
+                    </a:lnR>
+                    <a:lnT>
+                      <a:noFill/>
+                    </a:lnT>
+                    <a:lnB>
+                      <a:noFill/>
+                    </a:lnB>
+                    <a:noFill/>
+                  </a:tcPr>
+                </a:tc>
+                <a:extLst>
+                  <a:ext uri="{0D108BD9-81ED-4DB2-BD59-A6C34878D82A}">
+                    <a16:rowId xmlns:a16="http://schemas.microsoft.com/office/drawing/2014/main" val="2516975046"/>
+                  </a:ext>
+                </a:extLst>
+              </a:tr>
+              <a:tr h="334718">
+                <a:tc>
+                  <a:txBody>
+                    <a:bodyPr/>
+                    <a:lstStyle/>
+                    <a:p>
+                      <a:pPr>
+                        <a:buNone/>
+                      </a:pPr>
+                      <a:r>
+                        <a:rPr lang="en-US" sz="1600" dirty="0" err="1">
+                          <a:solidFill>
+                            <a:schemeClr val="tx2"/>
+                          </a:solidFill>
+                          <a:latin typeface="Consolas" panose="020B0609020204030204" pitchFamily="49" charset="0"/>
+                          <a:cs typeface="Courier New" panose="02070309020205020404" pitchFamily="49" charset="0"/>
+                        </a:rPr>
+                        <a:t>f.read</a:t>
+                      </a:r>
+                      <a:r>
+                        <a:rPr lang="en-US" sz="1600" dirty="0">
+                          <a:solidFill>
+                            <a:schemeClr val="tx2"/>
+                          </a:solidFill>
+                          <a:latin typeface="Consolas" panose="020B0609020204030204" pitchFamily="49" charset="0"/>
+                          <a:cs typeface="Courier New" panose="02070309020205020404" pitchFamily="49" charset="0"/>
+                        </a:rPr>
+                        <a:t>()</a:t>
+                      </a:r>
+                    </a:p>
+                  </a:txBody>
+                  <a:tcPr marL="54069" marR="54069" marT="41840" marB="41840" anchor="ctr">
+                    <a:lnL>
+                      <a:noFill/>
+                    </a:lnL>
+                    <a:lnR>
+                      <a:noFill/>
+                    </a:lnR>
+                    <a:lnT>
+                      <a:noFill/>
+                    </a:lnT>
+                    <a:lnB>
+                      <a:noFill/>
+                    </a:lnB>
+                    <a:noFill/>
+                  </a:tcPr>
+                </a:tc>
+                <a:tc>
+                  <a:txBody>
+                    <a:bodyPr/>
+                    <a:lstStyle/>
+                    <a:p>
+                      <a:pPr>
+                        <a:buNone/>
+                      </a:pPr>
+                      <a:r>
+                        <a:rPr lang="en-US" sz="1600"/>
+                        <a:t>Read entire file as a string</a:t>
+                      </a:r>
+                    </a:p>
+                  </a:txBody>
+                  <a:tcPr marL="54069" marR="54069" marT="41840" marB="41840" anchor="ctr">
+                    <a:lnL>
+                      <a:noFill/>
+                    </a:lnL>
+                    <a:lnR>
+                      <a:noFill/>
+                    </a:lnR>
+                    <a:lnT>
+                      <a:noFill/>
+                    </a:lnT>
+                    <a:lnB>
+                      <a:noFill/>
+                    </a:lnB>
+                    <a:noFill/>
+                  </a:tcPr>
+                </a:tc>
+                <a:extLst>
+                  <a:ext uri="{0D108BD9-81ED-4DB2-BD59-A6C34878D82A}">
+                    <a16:rowId xmlns:a16="http://schemas.microsoft.com/office/drawing/2014/main" val="1359915918"/>
+                  </a:ext>
+                </a:extLst>
+              </a:tr>
+              <a:tr h="334718">
+                <a:tc>
+                  <a:txBody>
+                    <a:bodyPr/>
+                    <a:lstStyle/>
+                    <a:p>
+                      <a:pPr>
+                        <a:buNone/>
+                      </a:pPr>
+                      <a:r>
+                        <a:rPr lang="en-US" sz="1600" dirty="0" err="1">
+                          <a:solidFill>
+                            <a:schemeClr val="tx2"/>
+                          </a:solidFill>
+                          <a:latin typeface="Consolas" panose="020B0609020204030204" pitchFamily="49" charset="0"/>
+                          <a:cs typeface="Courier New" panose="02070309020205020404" pitchFamily="49" charset="0"/>
+                        </a:rPr>
+                        <a:t>f.readlines</a:t>
+                      </a:r>
+                      <a:r>
+                        <a:rPr lang="en-US" sz="1600" dirty="0">
+                          <a:solidFill>
+                            <a:schemeClr val="tx2"/>
+                          </a:solidFill>
+                          <a:latin typeface="Consolas" panose="020B0609020204030204" pitchFamily="49" charset="0"/>
+                          <a:cs typeface="Courier New" panose="02070309020205020404" pitchFamily="49" charset="0"/>
+                        </a:rPr>
+                        <a:t>()</a:t>
+                      </a:r>
+                    </a:p>
+                  </a:txBody>
+                  <a:tcPr marL="54069" marR="54069" marT="41840" marB="41840" anchor="ctr">
+                    <a:lnL>
+                      <a:noFill/>
+                    </a:lnL>
+                    <a:lnR>
+                      <a:noFill/>
+                    </a:lnR>
+                    <a:lnT>
+                      <a:noFill/>
+                    </a:lnT>
+                    <a:lnB>
+                      <a:noFill/>
+                    </a:lnB>
+                    <a:noFill/>
+                  </a:tcPr>
+                </a:tc>
+                <a:tc>
+                  <a:txBody>
+                    <a:bodyPr/>
+                    <a:lstStyle/>
+                    <a:p>
+                      <a:pPr>
+                        <a:buNone/>
+                      </a:pPr>
+                      <a:r>
+                        <a:rPr lang="en-US" sz="1600"/>
+                        <a:t>Read file line by line into a list</a:t>
+                      </a:r>
+                    </a:p>
+                  </a:txBody>
+                  <a:tcPr marL="54069" marR="54069" marT="41840" marB="41840" anchor="ctr">
+                    <a:lnL>
+                      <a:noFill/>
+                    </a:lnL>
+                    <a:lnR>
+                      <a:noFill/>
+                    </a:lnR>
+                    <a:lnT>
+                      <a:noFill/>
+                    </a:lnT>
+                    <a:lnB>
+                      <a:noFill/>
+                    </a:lnB>
+                    <a:noFill/>
+                  </a:tcPr>
+                </a:tc>
+                <a:extLst>
+                  <a:ext uri="{0D108BD9-81ED-4DB2-BD59-A6C34878D82A}">
+                    <a16:rowId xmlns:a16="http://schemas.microsoft.com/office/drawing/2014/main" val="1233964758"/>
+                  </a:ext>
+                </a:extLst>
+              </a:tr>
+              <a:tr h="334718">
+                <a:tc>
+                  <a:txBody>
+                    <a:bodyPr/>
+                    <a:lstStyle/>
+                    <a:p>
+                      <a:pPr>
+                        <a:buNone/>
+                      </a:pPr>
+                      <a:r>
+                        <a:rPr lang="en-US" sz="1600" dirty="0">
+                          <a:solidFill>
+                            <a:schemeClr val="tx2"/>
+                          </a:solidFill>
+                          <a:latin typeface="Consolas" panose="020B0609020204030204" pitchFamily="49" charset="0"/>
+                          <a:cs typeface="Courier New" panose="02070309020205020404" pitchFamily="49" charset="0"/>
+                        </a:rPr>
+                        <a:t>for line in f:</a:t>
+                      </a:r>
+                    </a:p>
+                    <a:p>
+                      <a:pPr>
+                        <a:buNone/>
+                      </a:pPr>
+                      <a:r>
+                        <a:rPr lang="en-US" sz="1600" dirty="0">
+                          <a:solidFill>
+                            <a:schemeClr val="tx2"/>
+                          </a:solidFill>
+                          <a:latin typeface="Consolas" panose="020B0609020204030204" pitchFamily="49" charset="0"/>
+                          <a:cs typeface="Courier New" panose="02070309020205020404" pitchFamily="49" charset="0"/>
+                        </a:rPr>
+                        <a:t>  pass</a:t>
+                      </a:r>
+                    </a:p>
+                  </a:txBody>
+                  <a:tcPr marL="54069" marR="54069" marT="41840" marB="41840" anchor="ctr">
+                    <a:lnL>
+                      <a:noFill/>
+                    </a:lnL>
+                    <a:lnR>
+                      <a:noFill/>
+                    </a:lnR>
+                    <a:lnT>
+                      <a:noFill/>
+                    </a:lnT>
+                    <a:lnB>
+                      <a:noFill/>
+                    </a:lnB>
+                    <a:noFill/>
+                  </a:tcPr>
+                </a:tc>
+                <a:tc>
+                  <a:txBody>
+                    <a:bodyPr/>
+                    <a:lstStyle/>
+                    <a:p>
+                      <a:pPr>
+                        <a:buNone/>
+                      </a:pPr>
+                      <a:r>
+                        <a:rPr lang="en-US" sz="1600" dirty="0"/>
+                        <a:t>Loop through file line by line</a:t>
+                      </a:r>
+                    </a:p>
+                  </a:txBody>
+                  <a:tcPr marL="54069" marR="54069" marT="41840" marB="41840" anchor="ctr">
+                    <a:lnL>
+                      <a:noFill/>
+                    </a:lnL>
+                    <a:lnR>
+                      <a:noFill/>
+                    </a:lnR>
+                    <a:lnT>
+                      <a:noFill/>
+                    </a:lnT>
+                    <a:lnB>
+                      <a:noFill/>
+                    </a:lnB>
+                    <a:noFill/>
+                  </a:tcPr>
+                </a:tc>
+                <a:extLst>
+                  <a:ext uri="{0D108BD9-81ED-4DB2-BD59-A6C34878D82A}">
+                    <a16:rowId xmlns:a16="http://schemas.microsoft.com/office/drawing/2014/main" val="4106517580"/>
+                  </a:ext>
+                </a:extLst>
+              </a:tr>
+              <a:tr h="585757">
+                <a:tc>
+                  <a:txBody>
+                    <a:bodyPr/>
+                    <a:lstStyle/>
+                    <a:p>
+                      <a:pPr>
+                        <a:buNone/>
+                      </a:pPr>
+                      <a:r>
+                        <a:rPr lang="en-US" sz="1600" dirty="0">
+                          <a:solidFill>
+                            <a:schemeClr val="tx2"/>
+                          </a:solidFill>
+                          <a:latin typeface="Consolas" panose="020B0609020204030204" pitchFamily="49" charset="0"/>
+                          <a:cs typeface="Courier New" panose="02070309020205020404" pitchFamily="49" charset="0"/>
+                        </a:rPr>
+                        <a:t>with open('file.txt', 'w') as f:</a:t>
+                      </a:r>
+                      <a:br>
+                        <a:rPr lang="en-US" sz="1600" dirty="0">
+                          <a:solidFill>
+                            <a:schemeClr val="tx2"/>
+                          </a:solidFill>
+                          <a:latin typeface="Consolas" panose="020B0609020204030204" pitchFamily="49" charset="0"/>
+                          <a:cs typeface="Courier New" panose="02070309020205020404" pitchFamily="49" charset="0"/>
+                        </a:rPr>
+                      </a:br>
+                      <a:r>
+                        <a:rPr lang="en-US" sz="1600" dirty="0">
+                          <a:solidFill>
+                            <a:schemeClr val="tx2"/>
+                          </a:solidFill>
+                          <a:latin typeface="Consolas" panose="020B0609020204030204" pitchFamily="49" charset="0"/>
+                          <a:cs typeface="Courier New" panose="02070309020205020404" pitchFamily="49" charset="0"/>
+                        </a:rPr>
+                        <a:t>  </a:t>
+                      </a:r>
+                      <a:r>
+                        <a:rPr lang="en-US" sz="1600" dirty="0" err="1">
+                          <a:solidFill>
+                            <a:schemeClr val="tx2"/>
+                          </a:solidFill>
+                          <a:latin typeface="Consolas" panose="020B0609020204030204" pitchFamily="49" charset="0"/>
+                          <a:cs typeface="Courier New" panose="02070309020205020404" pitchFamily="49" charset="0"/>
+                        </a:rPr>
+                        <a:t>f.write</a:t>
+                      </a:r>
+                      <a:r>
+                        <a:rPr lang="en-US" sz="1600" dirty="0">
+                          <a:solidFill>
+                            <a:schemeClr val="tx2"/>
+                          </a:solidFill>
+                          <a:latin typeface="Consolas" panose="020B0609020204030204" pitchFamily="49" charset="0"/>
+                          <a:cs typeface="Courier New" panose="02070309020205020404" pitchFamily="49" charset="0"/>
+                        </a:rPr>
+                        <a:t>()</a:t>
+                      </a:r>
+                    </a:p>
+                  </a:txBody>
+                  <a:tcPr marL="54069" marR="54069" marT="41840" marB="41840" anchor="ctr">
+                    <a:lnL>
+                      <a:noFill/>
+                    </a:lnL>
+                    <a:lnR>
+                      <a:noFill/>
+                    </a:lnR>
+                    <a:lnT>
+                      <a:noFill/>
+                    </a:lnT>
+                    <a:lnB>
+                      <a:noFill/>
+                    </a:lnB>
+                    <a:noFill/>
+                  </a:tcPr>
+                </a:tc>
+                <a:tc>
+                  <a:txBody>
+                    <a:bodyPr/>
+                    <a:lstStyle/>
+                    <a:p>
+                      <a:pPr>
+                        <a:buNone/>
+                      </a:pPr>
+                      <a:r>
+                        <a:rPr lang="en-US" sz="1600"/>
+                        <a:t>Overwrite with new content</a:t>
+                      </a:r>
+                    </a:p>
+                  </a:txBody>
+                  <a:tcPr marL="54069" marR="54069" marT="41840" marB="41840" anchor="ctr">
+                    <a:lnL>
+                      <a:noFill/>
+                    </a:lnL>
+                    <a:lnR>
+                      <a:noFill/>
+                    </a:lnR>
+                    <a:lnT>
+                      <a:noFill/>
+                    </a:lnT>
+                    <a:lnB>
+                      <a:noFill/>
+                    </a:lnB>
+                    <a:noFill/>
+                  </a:tcPr>
+                </a:tc>
+                <a:extLst>
+                  <a:ext uri="{0D108BD9-81ED-4DB2-BD59-A6C34878D82A}">
+                    <a16:rowId xmlns:a16="http://schemas.microsoft.com/office/drawing/2014/main" val="1274082115"/>
+                  </a:ext>
+                </a:extLst>
+              </a:tr>
+              <a:tr h="585757">
+                <a:tc>
+                  <a:txBody>
+                    <a:bodyPr/>
+                    <a:lstStyle/>
+                    <a:p>
+                      <a:pPr>
+                        <a:buNone/>
+                      </a:pPr>
+                      <a:r>
+                        <a:rPr lang="en-US" sz="1600" dirty="0">
+                          <a:solidFill>
+                            <a:schemeClr val="tx2"/>
+                          </a:solidFill>
+                          <a:latin typeface="Consolas" panose="020B0609020204030204" pitchFamily="49" charset="0"/>
+                          <a:cs typeface="Courier New" panose="02070309020205020404" pitchFamily="49" charset="0"/>
+                        </a:rPr>
+                        <a:t>with open('file.txt', 'a') as f:</a:t>
+                      </a:r>
+                      <a:br>
+                        <a:rPr lang="en-US" sz="1600" dirty="0">
+                          <a:solidFill>
+                            <a:schemeClr val="tx2"/>
+                          </a:solidFill>
+                          <a:latin typeface="Consolas" panose="020B0609020204030204" pitchFamily="49" charset="0"/>
+                          <a:cs typeface="Courier New" panose="02070309020205020404" pitchFamily="49" charset="0"/>
+                        </a:rPr>
+                      </a:br>
+                      <a:r>
+                        <a:rPr lang="en-US" sz="1600" dirty="0">
+                          <a:solidFill>
+                            <a:schemeClr val="tx2"/>
+                          </a:solidFill>
+                          <a:latin typeface="Consolas" panose="020B0609020204030204" pitchFamily="49" charset="0"/>
+                          <a:cs typeface="Courier New" panose="02070309020205020404" pitchFamily="49" charset="0"/>
+                        </a:rPr>
+                        <a:t>  pass</a:t>
+                      </a:r>
+                    </a:p>
+                  </a:txBody>
+                  <a:tcPr marL="54069" marR="54069" marT="41840" marB="41840" anchor="ctr">
+                    <a:lnL>
+                      <a:noFill/>
+                    </a:lnL>
+                    <a:lnR>
+                      <a:noFill/>
+                    </a:lnR>
+                    <a:lnT>
+                      <a:noFill/>
+                    </a:lnT>
+                    <a:lnB>
+                      <a:noFill/>
+                    </a:lnB>
+                    <a:noFill/>
+                  </a:tcPr>
+                </a:tc>
+                <a:tc>
+                  <a:txBody>
+                    <a:bodyPr/>
+                    <a:lstStyle/>
+                    <a:p>
+                      <a:pPr>
+                        <a:buNone/>
+                      </a:pPr>
+                      <a:r>
+                        <a:rPr lang="en-US" sz="1600" dirty="0"/>
+                        <a:t>Add content to end without erasing existing</a:t>
+                      </a:r>
+                    </a:p>
+                  </a:txBody>
+                  <a:tcPr marL="54069" marR="54069" marT="41840" marB="41840" anchor="ctr">
+                    <a:lnL>
+                      <a:noFill/>
+                    </a:lnL>
+                    <a:lnR>
+                      <a:noFill/>
+                    </a:lnR>
+                    <a:lnT>
+                      <a:noFill/>
+                    </a:lnT>
+                    <a:lnB>
+                      <a:noFill/>
+                    </a:lnB>
+                    <a:noFill/>
+                  </a:tcPr>
+                </a:tc>
+                <a:extLst>
+                  <a:ext uri="{0D108BD9-81ED-4DB2-BD59-A6C34878D82A}">
+                    <a16:rowId xmlns:a16="http://schemas.microsoft.com/office/drawing/2014/main" val="590201874"/>
+                  </a:ext>
+                </a:extLst>
+              </a:tr>
+              <a:tr h="334718">
+                <a:tc>
+                  <a:txBody>
+                    <a:bodyPr/>
+                    <a:lstStyle/>
+                    <a:p>
+                      <a:pPr>
+                        <a:buNone/>
+                      </a:pPr>
+                      <a:r>
+                        <a:rPr lang="en-US" sz="1600" dirty="0" err="1">
+                          <a:solidFill>
+                            <a:schemeClr val="tx2"/>
+                          </a:solidFill>
+                          <a:latin typeface="Consolas" panose="020B0609020204030204" pitchFamily="49" charset="0"/>
+                          <a:cs typeface="Courier New" panose="02070309020205020404" pitchFamily="49" charset="0"/>
+                        </a:rPr>
+                        <a:t>f.writelines</a:t>
+                      </a:r>
+                      <a:r>
+                        <a:rPr lang="en-US" sz="1600" dirty="0">
+                          <a:solidFill>
+                            <a:schemeClr val="tx2"/>
+                          </a:solidFill>
+                          <a:latin typeface="Consolas" panose="020B0609020204030204" pitchFamily="49" charset="0"/>
+                          <a:cs typeface="Courier New" panose="02070309020205020404" pitchFamily="49" charset="0"/>
+                        </a:rPr>
+                        <a:t>(lines)</a:t>
+                      </a:r>
+                    </a:p>
+                  </a:txBody>
+                  <a:tcPr marL="54069" marR="54069" marT="41840" marB="41840" anchor="ctr">
+                    <a:lnL>
+                      <a:noFill/>
+                    </a:lnL>
+                    <a:lnR>
+                      <a:noFill/>
+                    </a:lnR>
+                    <a:lnT>
+                      <a:noFill/>
+                    </a:lnT>
+                    <a:lnB>
+                      <a:noFill/>
+                    </a:lnB>
+                    <a:noFill/>
+                  </a:tcPr>
+                </a:tc>
+                <a:tc>
+                  <a:txBody>
+                    <a:bodyPr/>
+                    <a:lstStyle/>
+                    <a:p>
+                      <a:pPr>
+                        <a:buNone/>
+                      </a:pPr>
+                      <a:r>
+                        <a:rPr lang="en-US" sz="1600" dirty="0"/>
+                        <a:t>Write a list of strings</a:t>
+                      </a:r>
+                    </a:p>
+                  </a:txBody>
+                  <a:tcPr marL="54069" marR="54069" marT="41840" marB="41840" anchor="ctr">
+                    <a:lnL>
+                      <a:noFill/>
+                    </a:lnL>
+                    <a:lnR>
+                      <a:noFill/>
+                    </a:lnR>
+                    <a:lnT>
+                      <a:noFill/>
+                    </a:lnT>
+                    <a:lnB>
+                      <a:noFill/>
+                    </a:lnB>
+                    <a:noFill/>
+                  </a:tcPr>
+                </a:tc>
+                <a:extLst>
+                  <a:ext uri="{0D108BD9-81ED-4DB2-BD59-A6C34878D82A}">
+                    <a16:rowId xmlns:a16="http://schemas.microsoft.com/office/drawing/2014/main" val="4183087875"/>
+                  </a:ext>
+                </a:extLst>
+              </a:tr>
+            </a:tbl>
+          </a:graphicData>
+        </a:graphic>
+      </p:graphicFrame>
+    </p:spTree>
+    <p:extLst>
+      <p:ext uri="{BB962C8B-B14F-4D97-AF65-F5344CB8AC3E}">
+        <p14:creationId xmlns:p14="http://schemas.microsoft.com/office/powerpoint/2010/main" val="653065319"/>
+      </p:ext>
+    </p:extLst>
+  </p:cSld>
+  <p:clrMapOvr>
+    <a:masterClrMapping/>
+  </p:clrMapOvr>
+</p:sld>
+</file>
+
+<file path=ppt/slides/slide15.xml><?xml version="1.0" encoding="utf-8"?>
+<p:sld xmlns:a="http://schemas.openxmlformats.org/drawingml/2006/main" xmlns:r="http://schemas.openxmlformats.org/officeDocument/2006/relationships" xmlns:p="http://schemas.openxmlformats.org/presentationml/2006/main">
+  <p:cSld>
+    <p:spTree>
+      <p:nvGrpSpPr>
+        <p:cNvPr id="1" name=""/>
+        <p:cNvGrpSpPr/>
+        <p:nvPr/>
+      </p:nvGrpSpPr>
+      <p:grpSpPr>
+        <a:xfrm>
+          <a:off x="0" y="0"/>
+          <a:ext cx="0" cy="0"/>
+          <a:chOff x="0" y="0"/>
+          <a:chExt cx="0" cy="0"/>
+        </a:xfrm>
+      </p:grpSpPr>
+      <p:sp>
+        <p:nvSpPr>
+          <p:cNvPr id="2" name="Title 1">
+            <a:extLst>
+              <a:ext uri="{FF2B5EF4-FFF2-40B4-BE49-F238E27FC236}">
+                <a16:creationId xmlns:a16="http://schemas.microsoft.com/office/drawing/2014/main" id="{43DC732B-C0CE-A8CC-4FEF-491CF35AB684}"/>
+              </a:ext>
+            </a:extLst>
+          </p:cNvPr>
+          <p:cNvSpPr>
+            <a:spLocks noGrp="1"/>
+          </p:cNvSpPr>
+          <p:nvPr>
+            <p:ph type="title"/>
+          </p:nvPr>
+        </p:nvSpPr>
+        <p:spPr/>
+        <p:txBody>
+          <a:bodyPr/>
+          <a:lstStyle/>
+          <a:p>
+            <a:r>
+              <a:rPr lang="en-US" dirty="0"/>
+              <a:t>A word about context managers</a:t>
+            </a:r>
+          </a:p>
+        </p:txBody>
+      </p:sp>
+      <p:pic>
+        <p:nvPicPr>
+          <p:cNvPr id="7" name="Content Placeholder 6">
+            <a:extLst>
+              <a:ext uri="{FF2B5EF4-FFF2-40B4-BE49-F238E27FC236}">
+                <a16:creationId xmlns:a16="http://schemas.microsoft.com/office/drawing/2014/main" id="{60CE308F-920C-D8CC-CD6B-88212B274861}"/>
+              </a:ext>
+            </a:extLst>
+          </p:cNvPr>
+          <p:cNvPicPr>
+            <a:picLocks noGrp="1" noChangeAspect="1"/>
+          </p:cNvPicPr>
+          <p:nvPr>
+            <p:ph sz="half" idx="4294967295"/>
+          </p:nvPr>
+        </p:nvPicPr>
+        <p:blipFill>
+          <a:blip r:embed="rId3"/>
+          <a:stretch>
+            <a:fillRect/>
+          </a:stretch>
+        </p:blipFill>
+        <p:spPr>
+          <a:xfrm>
+            <a:off x="191386" y="1600518"/>
+            <a:ext cx="7738252" cy="1401135"/>
+          </a:xfrm>
+        </p:spPr>
+      </p:pic>
+      <p:pic>
+        <p:nvPicPr>
+          <p:cNvPr id="9" name="Content Placeholder 8">
+            <a:extLst>
+              <a:ext uri="{FF2B5EF4-FFF2-40B4-BE49-F238E27FC236}">
+                <a16:creationId xmlns:a16="http://schemas.microsoft.com/office/drawing/2014/main" id="{AE1785C3-B737-6AE0-022D-86EB020BB4A4}"/>
+              </a:ext>
+            </a:extLst>
+          </p:cNvPr>
+          <p:cNvPicPr>
+            <a:picLocks noGrp="1" noChangeAspect="1"/>
+          </p:cNvPicPr>
+          <p:nvPr>
+            <p:ph sz="half" idx="4294967295"/>
+          </p:nvPr>
+        </p:nvPicPr>
+        <p:blipFill>
+          <a:blip r:embed="rId4"/>
+          <a:stretch>
+            <a:fillRect/>
+          </a:stretch>
+        </p:blipFill>
+        <p:spPr>
+          <a:xfrm>
+            <a:off x="191386" y="3910530"/>
+            <a:ext cx="8406804" cy="1401134"/>
+          </a:xfrm>
+        </p:spPr>
+      </p:pic>
+    </p:spTree>
+    <p:extLst>
+      <p:ext uri="{BB962C8B-B14F-4D97-AF65-F5344CB8AC3E}">
+        <p14:creationId xmlns:p14="http://schemas.microsoft.com/office/powerpoint/2010/main" val="2229007758"/>
+      </p:ext>
+    </p:extLst>
+  </p:cSld>
+  <p:clrMapOvr>
+    <a:masterClrMapping/>
+  </p:clrMapOvr>
+</p:sld>
+</file>
+
+<file path=ppt/slides/slide16.xml><?xml version="1.0" encoding="utf-8"?>
+<p:sld xmlns:a="http://schemas.openxmlformats.org/drawingml/2006/main" xmlns:r="http://schemas.openxmlformats.org/officeDocument/2006/relationships" xmlns:p="http://schemas.openxmlformats.org/presentationml/2006/main">
+  <p:cSld>
+    <p:spTree>
+      <p:nvGrpSpPr>
+        <p:cNvPr id="1" name=""/>
+        <p:cNvGrpSpPr/>
+        <p:nvPr/>
+      </p:nvGrpSpPr>
+      <p:grpSpPr>
+        <a:xfrm>
+          <a:off x="0" y="0"/>
+          <a:ext cx="0" cy="0"/>
+          <a:chOff x="0" y="0"/>
+          <a:chExt cx="0" cy="0"/>
+        </a:xfrm>
+      </p:grpSpPr>
+      <p:sp>
+        <p:nvSpPr>
+          <p:cNvPr id="5" name="Title 4">
+            <a:extLst>
+              <a:ext uri="{FF2B5EF4-FFF2-40B4-BE49-F238E27FC236}">
+                <a16:creationId xmlns:a16="http://schemas.microsoft.com/office/drawing/2014/main" id="{CF48DEDE-6A36-9908-9DD1-7ACF621226A8}"/>
+              </a:ext>
+            </a:extLst>
+          </p:cNvPr>
+          <p:cNvSpPr>
+            <a:spLocks noGrp="1"/>
+          </p:cNvSpPr>
+          <p:nvPr>
+            <p:ph type="title"/>
+          </p:nvPr>
+        </p:nvSpPr>
+        <p:spPr/>
+        <p:txBody>
+          <a:bodyPr/>
+          <a:lstStyle/>
+          <a:p>
+            <a:r>
+              <a:rPr lang="en-US" dirty="0"/>
+              <a:t>Both!</a:t>
+            </a:r>
+          </a:p>
+        </p:txBody>
+      </p:sp>
+      <p:pic>
+        <p:nvPicPr>
+          <p:cNvPr id="8" name="Content Placeholder 7">
+            <a:extLst>
+              <a:ext uri="{FF2B5EF4-FFF2-40B4-BE49-F238E27FC236}">
+                <a16:creationId xmlns:a16="http://schemas.microsoft.com/office/drawing/2014/main" id="{E9459C75-8E15-77A8-710F-D2EEC8AB06C9}"/>
+              </a:ext>
+            </a:extLst>
+          </p:cNvPr>
+          <p:cNvPicPr>
+            <a:picLocks noGrp="1" noChangeAspect="1"/>
+          </p:cNvPicPr>
+          <p:nvPr>
+            <p:ph idx="4294967295"/>
+          </p:nvPr>
+        </p:nvPicPr>
+        <p:blipFill>
+          <a:blip r:embed="rId2"/>
+          <a:stretch>
+            <a:fillRect/>
+          </a:stretch>
+        </p:blipFill>
+        <p:spPr>
+          <a:xfrm>
+            <a:off x="333153" y="1383933"/>
+            <a:ext cx="11015321" cy="1189037"/>
+          </a:xfrm>
+        </p:spPr>
+      </p:pic>
+    </p:spTree>
+    <p:extLst>
+      <p:ext uri="{BB962C8B-B14F-4D97-AF65-F5344CB8AC3E}">
+        <p14:creationId xmlns:p14="http://schemas.microsoft.com/office/powerpoint/2010/main" val="4013538754"/>
+      </p:ext>
+    </p:extLst>
+  </p:cSld>
+  <p:clrMapOvr>
+    <a:masterClrMapping/>
+  </p:clrMapOvr>
+</p:sld>
+</file>
+
+<file path=ppt/slides/slide17.xml><?xml version="1.0" encoding="utf-8"?>
+<p:sld xmlns:a="http://schemas.openxmlformats.org/drawingml/2006/main" xmlns:r="http://schemas.openxmlformats.org/officeDocument/2006/relationships" xmlns:p="http://schemas.openxmlformats.org/presentationml/2006/main">
+  <p:cSld>
+    <p:spTree>
+      <p:nvGrpSpPr>
+        <p:cNvPr id="1" name=""/>
+        <p:cNvGrpSpPr/>
+        <p:nvPr/>
+      </p:nvGrpSpPr>
+      <p:grpSpPr>
+        <a:xfrm>
+          <a:off x="0" y="0"/>
+          <a:ext cx="0" cy="0"/>
+          <a:chOff x="0" y="0"/>
+          <a:chExt cx="0" cy="0"/>
+        </a:xfrm>
+      </p:grpSpPr>
+      <p:sp>
+        <p:nvSpPr>
+          <p:cNvPr id="5" name="Title 4">
+            <a:extLst>
+              <a:ext uri="{FF2B5EF4-FFF2-40B4-BE49-F238E27FC236}">
+                <a16:creationId xmlns:a16="http://schemas.microsoft.com/office/drawing/2014/main" id="{3B703F05-852F-AE03-891C-5F619074CC0A}"/>
+              </a:ext>
+            </a:extLst>
+          </p:cNvPr>
+          <p:cNvSpPr>
+            <a:spLocks noGrp="1"/>
+          </p:cNvSpPr>
+          <p:nvPr>
+            <p:ph type="title"/>
+          </p:nvPr>
+        </p:nvSpPr>
+        <p:spPr/>
+        <p:txBody>
+          <a:bodyPr/>
+          <a:lstStyle/>
+          <a:p>
+            <a:r>
+              <a:rPr lang="en-US" dirty="0"/>
+              <a:t>MANIPULATING FILES PRACTICAL </a:t>
+            </a:r>
+          </a:p>
+        </p:txBody>
+      </p:sp>
+      <p:sp>
+        <p:nvSpPr>
+          <p:cNvPr id="6" name="Content Placeholder 5">
+            <a:extLst>
+              <a:ext uri="{FF2B5EF4-FFF2-40B4-BE49-F238E27FC236}">
+                <a16:creationId xmlns:a16="http://schemas.microsoft.com/office/drawing/2014/main" id="{7CC8BCFF-F88D-9947-8910-B16FF4E68C8D}"/>
+              </a:ext>
+            </a:extLst>
+          </p:cNvPr>
+          <p:cNvSpPr>
+            <a:spLocks noGrp="1"/>
+          </p:cNvSpPr>
+          <p:nvPr>
+            <p:ph type="body" sz="quarter" idx="11"/>
+          </p:nvPr>
+        </p:nvSpPr>
+        <p:spPr>
+          <a:xfrm>
+            <a:off x="548640" y="1234440"/>
+            <a:ext cx="11094720" cy="4023360"/>
+          </a:xfrm>
+        </p:spPr>
+        <p:txBody>
+          <a:bodyPr/>
+          <a:lstStyle/>
+          <a:p>
+            <a:r>
+              <a:rPr lang="en-US" dirty="0"/>
+              <a:t>Write a Python script that will write 100 random integers ranging from 50 to 100 into a file.  Each integer should be on a separate line.</a:t>
+            </a:r>
+            <a:br>
+              <a:rPr lang="en-US" dirty="0"/>
+            </a:br>
+            <a:endParaRPr lang="en-US" dirty="0"/>
+          </a:p>
+          <a:p>
+            <a:endParaRPr lang="en-US" dirty="0"/>
+          </a:p>
+          <a:p>
+            <a:r>
+              <a:rPr lang="en-US" dirty="0"/>
+              <a:t>Write another Python script that reads from that file, finds the minimum value, maximum value, and average value of the 100 random integers.  Do not use min() or max() functions.  Find a way to get these values without a built in function.</a:t>
+            </a:r>
+          </a:p>
+        </p:txBody>
+      </p:sp>
+    </p:spTree>
+    <p:extLst>
+      <p:ext uri="{BB962C8B-B14F-4D97-AF65-F5344CB8AC3E}">
+        <p14:creationId xmlns:p14="http://schemas.microsoft.com/office/powerpoint/2010/main" val="2100725509"/>
+      </p:ext>
+    </p:extLst>
+  </p:cSld>
+  <p:clrMapOvr>
+    <a:masterClrMapping/>
+  </p:clrMapOvr>
+</p:sld>
+</file>
+
+<file path=ppt/slides/slide18.xml><?xml version="1.0" encoding="utf-8"?>
+<p:sld xmlns:a="http://schemas.openxmlformats.org/drawingml/2006/main" xmlns:r="http://schemas.openxmlformats.org/officeDocument/2006/relationships" xmlns:p="http://schemas.openxmlformats.org/presentationml/2006/main">
+  <p:cSld>
+    <p:spTree>
+      <p:nvGrpSpPr>
+        <p:cNvPr id="1" name=""/>
+        <p:cNvGrpSpPr/>
+        <p:nvPr/>
+      </p:nvGrpSpPr>
+      <p:grpSpPr>
+        <a:xfrm>
+          <a:off x="0" y="0"/>
+          <a:ext cx="0" cy="0"/>
+          <a:chOff x="0" y="0"/>
+          <a:chExt cx="0" cy="0"/>
+        </a:xfrm>
+      </p:grpSpPr>
+      <p:sp>
+        <p:nvSpPr>
           <p:cNvPr id="5" name="Title 4">
             <a:extLst>
               <a:ext uri="{FF2B5EF4-FFF2-40B4-BE49-F238E27FC236}">
@@ -46946,7 +48150,7 @@
 </p:sld>
 </file>
 
-<file path=ppt/slides/slide14.xml><?xml version="1.0" encoding="utf-8"?>
+<file path=ppt/slides/slide19.xml><?xml version="1.0" encoding="utf-8"?>
 <p:sld xmlns:a="http://schemas.openxmlformats.org/drawingml/2006/main" xmlns:r="http://schemas.openxmlformats.org/officeDocument/2006/relationships" xmlns:p="http://schemas.openxmlformats.org/presentationml/2006/main">
   <p:cSld>
     <p:spTree>
@@ -47730,7 +48934,242 @@
 </p:sld>
 </file>
 
-<file path=ppt/slides/slide15.xml><?xml version="1.0" encoding="utf-8"?>
+<file path=ppt/slides/slide2.xml><?xml version="1.0" encoding="utf-8"?>
+<p:sld xmlns:a="http://schemas.openxmlformats.org/drawingml/2006/main" xmlns:r="http://schemas.openxmlformats.org/officeDocument/2006/relationships" xmlns:p="http://schemas.openxmlformats.org/presentationml/2006/main">
+  <p:cSld>
+    <p:spTree>
+      <p:nvGrpSpPr>
+        <p:cNvPr id="1" name="">
+          <a:extLst>
+            <a:ext uri="{FF2B5EF4-FFF2-40B4-BE49-F238E27FC236}">
+              <a16:creationId xmlns:a16="http://schemas.microsoft.com/office/drawing/2014/main" id="{5B19D20E-BD9A-847F-707A-41F7A86C8D39}"/>
+            </a:ext>
+          </a:extLst>
+        </p:cNvPr>
+        <p:cNvGrpSpPr/>
+        <p:nvPr/>
+      </p:nvGrpSpPr>
+      <p:grpSpPr>
+        <a:xfrm>
+          <a:off x="0" y="0"/>
+          <a:ext cx="0" cy="0"/>
+          <a:chOff x="0" y="0"/>
+          <a:chExt cx="0" cy="0"/>
+        </a:xfrm>
+      </p:grpSpPr>
+      <p:sp>
+        <p:nvSpPr>
+          <p:cNvPr id="2" name="Title 1">
+            <a:extLst>
+              <a:ext uri="{FF2B5EF4-FFF2-40B4-BE49-F238E27FC236}">
+                <a16:creationId xmlns:a16="http://schemas.microsoft.com/office/drawing/2014/main" id="{DC869BD9-8066-F6DB-BC59-621195265012}"/>
+              </a:ext>
+            </a:extLst>
+          </p:cNvPr>
+          <p:cNvSpPr>
+            <a:spLocks noGrp="1"/>
+          </p:cNvSpPr>
+          <p:nvPr>
+            <p:ph type="title"/>
+          </p:nvPr>
+        </p:nvSpPr>
+        <p:spPr/>
+        <p:txBody>
+          <a:bodyPr/>
+          <a:lstStyle/>
+          <a:p>
+            <a:br>
+              <a:rPr lang="en-US" dirty="0"/>
+            </a:br>
+            <a:r>
+              <a:rPr lang="en-US" dirty="0"/>
+              <a:t>Motivation</a:t>
+            </a:r>
+          </a:p>
+        </p:txBody>
+      </p:sp>
+      <p:pic>
+        <p:nvPicPr>
+          <p:cNvPr id="5" name="Online Media 4" title="Shia LaBeouf &quot;Just Do It&quot; Motivational Speech (Original Video by LaBeouf, Rönkkö &amp; Turner)">
+            <a:hlinkClick r:id="" action="ppaction://media"/>
+            <a:extLst>
+              <a:ext uri="{FF2B5EF4-FFF2-40B4-BE49-F238E27FC236}">
+                <a16:creationId xmlns:a16="http://schemas.microsoft.com/office/drawing/2014/main" id="{F897A0C9-F5F4-E02C-08D8-BD4BFD254FF8}"/>
+              </a:ext>
+            </a:extLst>
+          </p:cNvPr>
+          <p:cNvPicPr>
+            <a:picLocks noRot="1" noChangeAspect="1"/>
+          </p:cNvPicPr>
+          <p:nvPr>
+            <a:videoFile r:link="rId1"/>
+          </p:nvPr>
+        </p:nvPicPr>
+        <p:blipFill>
+          <a:blip r:embed="rId4"/>
+          <a:stretch>
+            <a:fillRect/>
+          </a:stretch>
+        </p:blipFill>
+        <p:spPr>
+          <a:xfrm>
+            <a:off x="1799923" y="1555719"/>
+            <a:ext cx="8162224" cy="4611667"/>
+          </a:xfrm>
+          <a:prstGeom prst="rect">
+            <a:avLst/>
+          </a:prstGeom>
+        </p:spPr>
+      </p:pic>
+    </p:spTree>
+    <p:extLst>
+      <p:ext uri="{BB962C8B-B14F-4D97-AF65-F5344CB8AC3E}">
+        <p14:creationId xmlns:p14="http://schemas.microsoft.com/office/powerpoint/2010/main" val="2254684427"/>
+      </p:ext>
+    </p:extLst>
+  </p:cSld>
+  <p:clrMapOvr>
+    <a:masterClrMapping/>
+  </p:clrMapOvr>
+  <p:timing>
+    <p:tnLst>
+      <p:par>
+        <p:cTn id="1" dur="indefinite" restart="never" nodeType="tmRoot">
+          <p:childTnLst>
+            <p:seq concurrent="1" nextAc="seek">
+              <p:cTn id="2" dur="indefinite" nodeType="mainSeq">
+                <p:childTnLst>
+                  <p:par>
+                    <p:cTn id="3" fill="hold">
+                      <p:stCondLst>
+                        <p:cond delay="indefinite"/>
+                      </p:stCondLst>
+                      <p:childTnLst>
+                        <p:par>
+                          <p:cTn id="4" fill="hold">
+                            <p:stCondLst>
+                              <p:cond delay="0"/>
+                            </p:stCondLst>
+                            <p:childTnLst>
+                              <p:par>
+                                <p:cTn id="5" presetID="1" presetClass="mediacall" presetSubtype="0" fill="hold" nodeType="clickEffect">
+                                  <p:stCondLst>
+                                    <p:cond delay="0"/>
+                                  </p:stCondLst>
+                                  <p:childTnLst>
+                                    <p:cmd type="call" cmd="playFrom(0.0)">
+                                      <p:cBhvr>
+                                        <p:cTn id="6" dur="1" fill="hold"/>
+                                        <p:tgtEl>
+                                          <p:spTgt spid="5"/>
+                                        </p:tgtEl>
+                                      </p:cBhvr>
+                                    </p:cmd>
+                                  </p:childTnLst>
+                                </p:cTn>
+                              </p:par>
+                            </p:childTnLst>
+                          </p:cTn>
+                        </p:par>
+                      </p:childTnLst>
+                    </p:cTn>
+                  </p:par>
+                </p:childTnLst>
+              </p:cTn>
+              <p:prevCondLst>
+                <p:cond evt="onPrev" delay="0">
+                  <p:tgtEl>
+                    <p:sldTgt/>
+                  </p:tgtEl>
+                </p:cond>
+              </p:prevCondLst>
+              <p:nextCondLst>
+                <p:cond evt="onNext" delay="0">
+                  <p:tgtEl>
+                    <p:sldTgt/>
+                  </p:tgtEl>
+                </p:cond>
+              </p:nextCondLst>
+            </p:seq>
+            <p:video>
+              <p:cMediaNode vol="80000">
+                <p:cTn id="7" fill="hold" display="0">
+                  <p:stCondLst>
+                    <p:cond delay="indefinite"/>
+                  </p:stCondLst>
+                </p:cTn>
+                <p:tgtEl>
+                  <p:spTgt spid="5"/>
+                </p:tgtEl>
+              </p:cMediaNode>
+            </p:video>
+            <p:seq concurrent="1" nextAc="seek">
+              <p:cTn id="8" restart="whenNotActive" fill="hold" evtFilter="cancelBubble" nodeType="interactiveSeq">
+                <p:stCondLst>
+                  <p:cond evt="onClick" delay="0">
+                    <p:tgtEl>
+                      <p:spTgt spid="5"/>
+                    </p:tgtEl>
+                  </p:cond>
+                </p:stCondLst>
+                <p:endSync evt="end" delay="0">
+                  <p:rtn val="all"/>
+                </p:endSync>
+                <p:childTnLst>
+                  <p:par>
+                    <p:cTn id="9" fill="hold">
+                      <p:stCondLst>
+                        <p:cond delay="0"/>
+                      </p:stCondLst>
+                      <p:childTnLst>
+                        <p:par>
+                          <p:cTn id="10" fill="hold">
+                            <p:stCondLst>
+                              <p:cond delay="0"/>
+                            </p:stCondLst>
+                            <p:childTnLst>
+                              <p:par>
+                                <p:cTn id="11" presetID="2" presetClass="mediacall" presetSubtype="0" fill="hold" nodeType="clickEffect">
+                                  <p:stCondLst>
+                                    <p:cond delay="0"/>
+                                  </p:stCondLst>
+                                  <p:childTnLst>
+                                    <p:cmd type="call" cmd="togglePause">
+                                      <p:cBhvr>
+                                        <p:cTn id="12" dur="1" fill="hold"/>
+                                        <p:tgtEl>
+                                          <p:spTgt spid="5"/>
+                                        </p:tgtEl>
+                                      </p:cBhvr>
+                                    </p:cmd>
+                                  </p:childTnLst>
+                                </p:cTn>
+                              </p:par>
+                            </p:childTnLst>
+                          </p:cTn>
+                        </p:par>
+                      </p:childTnLst>
+                    </p:cTn>
+                  </p:par>
+                </p:childTnLst>
+              </p:cTn>
+              <p:nextCondLst>
+                <p:cond evt="onClick" delay="0">
+                  <p:tgtEl>
+                    <p:spTgt spid="5"/>
+                  </p:tgtEl>
+                </p:cond>
+              </p:nextCondLst>
+            </p:seq>
+          </p:childTnLst>
+        </p:cTn>
+      </p:par>
+    </p:tnLst>
+  </p:timing>
+</p:sld>
+</file>
+
+<file path=ppt/slides/slide20.xml><?xml version="1.0" encoding="utf-8"?>
 <p:sld xmlns:a="http://schemas.openxmlformats.org/drawingml/2006/main" xmlns:r="http://schemas.openxmlformats.org/officeDocument/2006/relationships" xmlns:p="http://schemas.openxmlformats.org/presentationml/2006/main">
   <p:cSld>
     <p:spTree>
@@ -47796,7 +49235,7 @@
         <p:spPr>
           <a:xfrm>
             <a:off x="548640" y="1432853"/>
-            <a:ext cx="9057373" cy="4401205"/>
+            <a:ext cx="9057373" cy="3477875"/>
           </a:xfrm>
           <a:prstGeom prst="rect">
             <a:avLst/>
@@ -47808,49 +49247,6 @@
             <a:spAutoFit/>
           </a:bodyPr>
           <a:lstStyle/>
-          <a:p>
-            <a:pPr>
-              <a:buNone/>
-            </a:pPr>
-            <a:r>
-              <a:rPr lang="en-US" sz="2000" b="1" dirty="0"/>
-              <a:t>3. Environment Variables</a:t>
-            </a:r>
-            <a:endParaRPr lang="en-US" sz="2000" dirty="0"/>
-          </a:p>
-          <a:p>
-            <a:pPr>
-              <a:buFont typeface="Arial" panose="020B0604020202020204" pitchFamily="34" charset="0"/>
-              <a:buChar char="•"/>
-            </a:pPr>
-            <a:r>
-              <a:rPr lang="en-US" sz="2000" dirty="0"/>
-              <a:t>Read and set environment variables: </a:t>
-            </a:r>
-            <a:r>
-              <a:rPr lang="en-US" sz="2000" dirty="0" err="1">
-                <a:latin typeface="Courier New" panose="02070309020205020404" pitchFamily="49" charset="0"/>
-              </a:rPr>
-              <a:t>os.environ.get</a:t>
-            </a:r>
-            <a:r>
-              <a:rPr lang="en-US" sz="2000" dirty="0">
-                <a:latin typeface="Courier New" panose="02070309020205020404" pitchFamily="49" charset="0"/>
-              </a:rPr>
-              <a:t>("HOME")</a:t>
-            </a:r>
-            <a:endParaRPr lang="en-US" sz="2000" dirty="0"/>
-          </a:p>
-          <a:p>
-            <a:pPr>
-              <a:buFont typeface="Arial" panose="020B0604020202020204" pitchFamily="34" charset="0"/>
-              <a:buChar char="•"/>
-            </a:pPr>
-            <a:r>
-              <a:rPr lang="en-US" sz="2000" dirty="0"/>
-              <a:t>Useful for configuration and secrets management</a:t>
-            </a:r>
-          </a:p>
           <a:p>
             <a:endParaRPr lang="en-US" sz="2000" dirty="0"/>
           </a:p>
@@ -48103,7 +49499,7 @@
                                         <p:tgtEl>
                                           <p:spTgt spid="3">
                                             <p:txEl>
-                                              <p:pRg st="0" end="0"/>
+                                              <p:pRg st="1" end="1"/>
                                             </p:txEl>
                                           </p:spTgt>
                                         </p:tgtEl>
@@ -48134,7 +49530,7 @@
                                         <p:tgtEl>
                                           <p:spTgt spid="3">
                                             <p:txEl>
-                                              <p:pRg st="1" end="1"/>
+                                              <p:pRg st="2" end="2"/>
                                             </p:txEl>
                                           </p:spTgt>
                                         </p:tgtEl>
@@ -48165,7 +49561,7 @@
                                         <p:tgtEl>
                                           <p:spTgt spid="3">
                                             <p:txEl>
-                                              <p:pRg st="2" end="2"/>
+                                              <p:pRg st="3" end="3"/>
                                             </p:txEl>
                                           </p:spTgt>
                                         </p:tgtEl>
@@ -48180,33 +49576,15 @@
                                   </p:childTnLst>
                                 </p:cTn>
                               </p:par>
-                            </p:childTnLst>
-                          </p:cTn>
-                        </p:par>
-                      </p:childTnLst>
-                    </p:cTn>
-                  </p:par>
-                  <p:par>
-                    <p:cTn id="11" fill="hold">
-                      <p:stCondLst>
-                        <p:cond delay="indefinite"/>
-                      </p:stCondLst>
-                      <p:childTnLst>
-                        <p:par>
-                          <p:cTn id="12" fill="hold">
-                            <p:stCondLst>
-                              <p:cond delay="0"/>
-                            </p:stCondLst>
-                            <p:childTnLst>
                               <p:par>
-                                <p:cTn id="13" presetID="1" presetClass="entr" presetSubtype="0" fill="hold" nodeType="clickEffect">
+                                <p:cTn id="11" presetID="1" presetClass="entr" presetSubtype="0" fill="hold" nodeType="withEffect">
                                   <p:stCondLst>
                                     <p:cond delay="0"/>
                                   </p:stCondLst>
                                   <p:childTnLst>
                                     <p:set>
                                       <p:cBhvr>
-                                        <p:cTn id="14" dur="1" fill="hold">
+                                        <p:cTn id="12" dur="1" fill="hold">
                                           <p:stCondLst>
                                             <p:cond delay="0"/>
                                           </p:stCondLst>
@@ -48229,8 +49607,26 @@
                                   </p:childTnLst>
                                 </p:cTn>
                               </p:par>
+                            </p:childTnLst>
+                          </p:cTn>
+                        </p:par>
+                      </p:childTnLst>
+                    </p:cTn>
+                  </p:par>
+                  <p:par>
+                    <p:cTn id="13" fill="hold">
+                      <p:stCondLst>
+                        <p:cond delay="indefinite"/>
+                      </p:stCondLst>
+                      <p:childTnLst>
+                        <p:par>
+                          <p:cTn id="14" fill="hold">
+                            <p:stCondLst>
+                              <p:cond delay="0"/>
+                            </p:stCondLst>
+                            <p:childTnLst>
                               <p:par>
-                                <p:cTn id="15" presetID="1" presetClass="entr" presetSubtype="0" fill="hold" nodeType="withEffect">
+                                <p:cTn id="15" presetID="1" presetClass="entr" presetSubtype="0" fill="hold" nodeType="clickEffect">
                                   <p:stCondLst>
                                     <p:cond delay="0"/>
                                   </p:stCondLst>
@@ -48245,7 +49641,7 @@
                                         <p:tgtEl>
                                           <p:spTgt spid="3">
                                             <p:txEl>
-                                              <p:pRg st="5" end="5"/>
+                                              <p:pRg st="6" end="6"/>
                                             </p:txEl>
                                           </p:spTgt>
                                         </p:tgtEl>
@@ -48276,7 +49672,7 @@
                                         <p:tgtEl>
                                           <p:spTgt spid="3">
                                             <p:txEl>
-                                              <p:pRg st="6" end="6"/>
+                                              <p:pRg st="7" end="7"/>
                                             </p:txEl>
                                           </p:spTgt>
                                         </p:tgtEl>
@@ -48307,56 +49703,7 @@
                                         <p:tgtEl>
                                           <p:spTgt spid="3">
                                             <p:txEl>
-                                              <p:pRg st="7" end="7"/>
-                                            </p:txEl>
-                                          </p:spTgt>
-                                        </p:tgtEl>
-                                        <p:attrNameLst>
-                                          <p:attrName>style.visibility</p:attrName>
-                                        </p:attrNameLst>
-                                      </p:cBhvr>
-                                      <p:to>
-                                        <p:strVal val="visible"/>
-                                      </p:to>
-                                    </p:set>
-                                  </p:childTnLst>
-                                </p:cTn>
-                              </p:par>
-                            </p:childTnLst>
-                          </p:cTn>
-                        </p:par>
-                      </p:childTnLst>
-                    </p:cTn>
-                  </p:par>
-                  <p:par>
-                    <p:cTn id="21" fill="hold">
-                      <p:stCondLst>
-                        <p:cond delay="indefinite"/>
-                      </p:stCondLst>
-                      <p:childTnLst>
-                        <p:par>
-                          <p:cTn id="22" fill="hold">
-                            <p:stCondLst>
-                              <p:cond delay="0"/>
-                            </p:stCondLst>
-                            <p:childTnLst>
-                              <p:par>
-                                <p:cTn id="23" presetID="1" presetClass="entr" presetSubtype="0" fill="hold" nodeType="clickEffect">
-                                  <p:stCondLst>
-                                    <p:cond delay="0"/>
-                                  </p:stCondLst>
-                                  <p:childTnLst>
-                                    <p:set>
-                                      <p:cBhvr>
-                                        <p:cTn id="24" dur="1" fill="hold">
-                                          <p:stCondLst>
-                                            <p:cond delay="0"/>
-                                          </p:stCondLst>
-                                        </p:cTn>
-                                        <p:tgtEl>
-                                          <p:spTgt spid="3">
-                                            <p:txEl>
-                                              <p:pRg st="9" end="9"/>
+                                              <p:pRg st="8" end="8"/>
                                             </p:txEl>
                                           </p:spTgt>
                                         </p:tgtEl>
@@ -48372,14 +49719,14 @@
                                 </p:cTn>
                               </p:par>
                               <p:par>
-                                <p:cTn id="25" presetID="1" presetClass="entr" presetSubtype="0" fill="hold" nodeType="withEffect">
+                                <p:cTn id="21" presetID="1" presetClass="entr" presetSubtype="0" fill="hold" nodeType="withEffect">
                                   <p:stCondLst>
                                     <p:cond delay="0"/>
                                   </p:stCondLst>
                                   <p:childTnLst>
                                     <p:set>
                                       <p:cBhvr>
-                                        <p:cTn id="26" dur="1" fill="hold">
+                                        <p:cTn id="22" dur="1" fill="hold">
                                           <p:stCondLst>
                                             <p:cond delay="0"/>
                                           </p:stCondLst>
@@ -48387,69 +49734,7 @@
                                         <p:tgtEl>
                                           <p:spTgt spid="3">
                                             <p:txEl>
-                                              <p:pRg st="10" end="10"/>
-                                            </p:txEl>
-                                          </p:spTgt>
-                                        </p:tgtEl>
-                                        <p:attrNameLst>
-                                          <p:attrName>style.visibility</p:attrName>
-                                        </p:attrNameLst>
-                                      </p:cBhvr>
-                                      <p:to>
-                                        <p:strVal val="visible"/>
-                                      </p:to>
-                                    </p:set>
-                                  </p:childTnLst>
-                                </p:cTn>
-                              </p:par>
-                              <p:par>
-                                <p:cTn id="27" presetID="1" presetClass="entr" presetSubtype="0" fill="hold" nodeType="withEffect">
-                                  <p:stCondLst>
-                                    <p:cond delay="0"/>
-                                  </p:stCondLst>
-                                  <p:childTnLst>
-                                    <p:set>
-                                      <p:cBhvr>
-                                        <p:cTn id="28" dur="1" fill="hold">
-                                          <p:stCondLst>
-                                            <p:cond delay="0"/>
-                                          </p:stCondLst>
-                                        </p:cTn>
-                                        <p:tgtEl>
-                                          <p:spTgt spid="3">
-                                            <p:txEl>
-                                              <p:pRg st="11" end="11"/>
-                                            </p:txEl>
-                                          </p:spTgt>
-                                        </p:tgtEl>
-                                        <p:attrNameLst>
-                                          <p:attrName>style.visibility</p:attrName>
-                                        </p:attrNameLst>
-                                      </p:cBhvr>
-                                      <p:to>
-                                        <p:strVal val="visible"/>
-                                      </p:to>
-                                    </p:set>
-                                  </p:childTnLst>
-                                </p:cTn>
-                              </p:par>
-                              <p:par>
-                                <p:cTn id="29" presetID="1" presetClass="entr" presetSubtype="0" fill="hold" nodeType="withEffect">
-                                  <p:stCondLst>
-                                    <p:cond delay="0"/>
-                                  </p:stCondLst>
-                                  <p:childTnLst>
-                                    <p:set>
-                                      <p:cBhvr>
-                                        <p:cTn id="30" dur="1" fill="hold">
-                                          <p:stCondLst>
-                                            <p:cond delay="0"/>
-                                          </p:stCondLst>
-                                        </p:cTn>
-                                        <p:tgtEl>
-                                          <p:spTgt spid="3">
-                                            <p:txEl>
-                                              <p:pRg st="12" end="12"/>
+                                              <p:pRg st="9" end="9"/>
                                             </p:txEl>
                                           </p:spTgt>
                                         </p:tgtEl>
@@ -48495,7 +49780,7 @@
 </p:sld>
 </file>
 
-<file path=ppt/slides/slide16.xml><?xml version="1.0" encoding="utf-8"?>
+<file path=ppt/slides/slide21.xml><?xml version="1.0" encoding="utf-8"?>
 <p:sld xmlns:a="http://schemas.openxmlformats.org/drawingml/2006/main" xmlns:r="http://schemas.openxmlformats.org/officeDocument/2006/relationships" xmlns:p="http://schemas.openxmlformats.org/presentationml/2006/main">
   <p:cSld>
     <p:spTree>
@@ -48748,7 +50033,7 @@
 </p:sld>
 </file>
 
-<file path=ppt/slides/slide17.xml><?xml version="1.0" encoding="utf-8"?>
+<file path=ppt/slides/slide22.xml><?xml version="1.0" encoding="utf-8"?>
 <p:sld xmlns:a="http://schemas.openxmlformats.org/drawingml/2006/main" xmlns:r="http://schemas.openxmlformats.org/officeDocument/2006/relationships" xmlns:p="http://schemas.openxmlformats.org/presentationml/2006/main">
   <p:cSld>
     <p:spTree>
@@ -49710,7 +50995,7 @@
 </p:sld>
 </file>
 
-<file path=ppt/slides/slide18.xml><?xml version="1.0" encoding="utf-8"?>
+<file path=ppt/slides/slide23.xml><?xml version="1.0" encoding="utf-8"?>
 <p:sld xmlns:a="http://schemas.openxmlformats.org/drawingml/2006/main" xmlns:r="http://schemas.openxmlformats.org/officeDocument/2006/relationships" xmlns:p="http://schemas.openxmlformats.org/presentationml/2006/main">
   <p:cSld>
     <p:spTree>
@@ -51106,7 +52391,96 @@
 </p:sld>
 </file>
 
-<file path=ppt/slides/slide19.xml><?xml version="1.0" encoding="utf-8"?>
+<file path=ppt/slides/slide24.xml><?xml version="1.0" encoding="utf-8"?>
+<p:sld xmlns:a="http://schemas.openxmlformats.org/drawingml/2006/main" xmlns:r="http://schemas.openxmlformats.org/officeDocument/2006/relationships" xmlns:p="http://schemas.openxmlformats.org/presentationml/2006/main">
+  <p:cSld>
+    <p:spTree>
+      <p:nvGrpSpPr>
+        <p:cNvPr id="1" name=""/>
+        <p:cNvGrpSpPr/>
+        <p:nvPr/>
+      </p:nvGrpSpPr>
+      <p:grpSpPr>
+        <a:xfrm>
+          <a:off x="0" y="0"/>
+          <a:ext cx="0" cy="0"/>
+          <a:chOff x="0" y="0"/>
+          <a:chExt cx="0" cy="0"/>
+        </a:xfrm>
+      </p:grpSpPr>
+      <p:sp>
+        <p:nvSpPr>
+          <p:cNvPr id="7" name="Title 6">
+            <a:extLst>
+              <a:ext uri="{FF2B5EF4-FFF2-40B4-BE49-F238E27FC236}">
+                <a16:creationId xmlns:a16="http://schemas.microsoft.com/office/drawing/2014/main" id="{A0A79DFE-CA6D-199F-1D8F-0A25E480F345}"/>
+              </a:ext>
+            </a:extLst>
+          </p:cNvPr>
+          <p:cNvSpPr>
+            <a:spLocks noGrp="1"/>
+          </p:cNvSpPr>
+          <p:nvPr>
+            <p:ph type="title"/>
+          </p:nvPr>
+        </p:nvSpPr>
+        <p:spPr/>
+        <p:txBody>
+          <a:bodyPr/>
+          <a:lstStyle/>
+          <a:p>
+            <a:r>
+              <a:rPr lang="en-US" dirty="0"/>
+              <a:t>Hands-On #1 in PYTHON_FILE_IO.MD</a:t>
+            </a:r>
+          </a:p>
+        </p:txBody>
+      </p:sp>
+      <p:sp>
+        <p:nvSpPr>
+          <p:cNvPr id="8" name="Content Placeholder 7">
+            <a:extLst>
+              <a:ext uri="{FF2B5EF4-FFF2-40B4-BE49-F238E27FC236}">
+                <a16:creationId xmlns:a16="http://schemas.microsoft.com/office/drawing/2014/main" id="{0C8DBF7A-ABA5-7245-19D0-84C717D30964}"/>
+              </a:ext>
+            </a:extLst>
+          </p:cNvPr>
+          <p:cNvSpPr>
+            <a:spLocks noGrp="1"/>
+          </p:cNvSpPr>
+          <p:nvPr>
+            <p:ph type="body" sz="quarter" idx="11"/>
+          </p:nvPr>
+        </p:nvSpPr>
+        <p:spPr/>
+        <p:txBody>
+          <a:bodyPr/>
+          <a:lstStyle/>
+          <a:p>
+            <a:r>
+              <a:rPr lang="en-US" dirty="0"/>
+              <a:t>Navigating file structures with python</a:t>
+            </a:r>
+          </a:p>
+          <a:p>
+            <a:endParaRPr lang="en-US" dirty="0"/>
+          </a:p>
+        </p:txBody>
+      </p:sp>
+    </p:spTree>
+    <p:extLst>
+      <p:ext uri="{BB962C8B-B14F-4D97-AF65-F5344CB8AC3E}">
+        <p14:creationId xmlns:p14="http://schemas.microsoft.com/office/powerpoint/2010/main" val="4018436934"/>
+      </p:ext>
+    </p:extLst>
+  </p:cSld>
+  <p:clrMapOvr>
+    <a:masterClrMapping/>
+  </p:clrMapOvr>
+</p:sld>
+</file>
+
+<file path=ppt/slides/slide25.xml><?xml version="1.0" encoding="utf-8"?>
 <p:sld xmlns:a="http://schemas.openxmlformats.org/drawingml/2006/main" xmlns:r="http://schemas.openxmlformats.org/officeDocument/2006/relationships" xmlns:p="http://schemas.openxmlformats.org/presentationml/2006/main">
   <p:cSld>
     <p:spTree>
@@ -52054,242 +53428,7 @@
 </p:sld>
 </file>
 
-<file path=ppt/slides/slide2.xml><?xml version="1.0" encoding="utf-8"?>
-<p:sld xmlns:a="http://schemas.openxmlformats.org/drawingml/2006/main" xmlns:r="http://schemas.openxmlformats.org/officeDocument/2006/relationships" xmlns:p="http://schemas.openxmlformats.org/presentationml/2006/main">
-  <p:cSld>
-    <p:spTree>
-      <p:nvGrpSpPr>
-        <p:cNvPr id="1" name="">
-          <a:extLst>
-            <a:ext uri="{FF2B5EF4-FFF2-40B4-BE49-F238E27FC236}">
-              <a16:creationId xmlns:a16="http://schemas.microsoft.com/office/drawing/2014/main" id="{5B19D20E-BD9A-847F-707A-41F7A86C8D39}"/>
-            </a:ext>
-          </a:extLst>
-        </p:cNvPr>
-        <p:cNvGrpSpPr/>
-        <p:nvPr/>
-      </p:nvGrpSpPr>
-      <p:grpSpPr>
-        <a:xfrm>
-          <a:off x="0" y="0"/>
-          <a:ext cx="0" cy="0"/>
-          <a:chOff x="0" y="0"/>
-          <a:chExt cx="0" cy="0"/>
-        </a:xfrm>
-      </p:grpSpPr>
-      <p:sp>
-        <p:nvSpPr>
-          <p:cNvPr id="2" name="Title 1">
-            <a:extLst>
-              <a:ext uri="{FF2B5EF4-FFF2-40B4-BE49-F238E27FC236}">
-                <a16:creationId xmlns:a16="http://schemas.microsoft.com/office/drawing/2014/main" id="{DC869BD9-8066-F6DB-BC59-621195265012}"/>
-              </a:ext>
-            </a:extLst>
-          </p:cNvPr>
-          <p:cNvSpPr>
-            <a:spLocks noGrp="1"/>
-          </p:cNvSpPr>
-          <p:nvPr>
-            <p:ph type="title"/>
-          </p:nvPr>
-        </p:nvSpPr>
-        <p:spPr/>
-        <p:txBody>
-          <a:bodyPr/>
-          <a:lstStyle/>
-          <a:p>
-            <a:br>
-              <a:rPr lang="en-US" dirty="0"/>
-            </a:br>
-            <a:r>
-              <a:rPr lang="en-US" dirty="0"/>
-              <a:t>Motivation</a:t>
-            </a:r>
-          </a:p>
-        </p:txBody>
-      </p:sp>
-      <p:pic>
-        <p:nvPicPr>
-          <p:cNvPr id="5" name="Online Media 4" title="Shia LaBeouf &quot;Just Do It&quot; Motivational Speech (Original Video by LaBeouf, Rönkkö &amp; Turner)">
-            <a:hlinkClick r:id="" action="ppaction://media"/>
-            <a:extLst>
-              <a:ext uri="{FF2B5EF4-FFF2-40B4-BE49-F238E27FC236}">
-                <a16:creationId xmlns:a16="http://schemas.microsoft.com/office/drawing/2014/main" id="{F897A0C9-F5F4-E02C-08D8-BD4BFD254FF8}"/>
-              </a:ext>
-            </a:extLst>
-          </p:cNvPr>
-          <p:cNvPicPr>
-            <a:picLocks noRot="1" noChangeAspect="1"/>
-          </p:cNvPicPr>
-          <p:nvPr>
-            <a:videoFile r:link="rId1"/>
-          </p:nvPr>
-        </p:nvPicPr>
-        <p:blipFill>
-          <a:blip r:embed="rId4"/>
-          <a:stretch>
-            <a:fillRect/>
-          </a:stretch>
-        </p:blipFill>
-        <p:spPr>
-          <a:xfrm>
-            <a:off x="1799923" y="1555719"/>
-            <a:ext cx="8162224" cy="4611667"/>
-          </a:xfrm>
-          <a:prstGeom prst="rect">
-            <a:avLst/>
-          </a:prstGeom>
-        </p:spPr>
-      </p:pic>
-    </p:spTree>
-    <p:extLst>
-      <p:ext uri="{BB962C8B-B14F-4D97-AF65-F5344CB8AC3E}">
-        <p14:creationId xmlns:p14="http://schemas.microsoft.com/office/powerpoint/2010/main" val="2254684427"/>
-      </p:ext>
-    </p:extLst>
-  </p:cSld>
-  <p:clrMapOvr>
-    <a:masterClrMapping/>
-  </p:clrMapOvr>
-  <p:timing>
-    <p:tnLst>
-      <p:par>
-        <p:cTn id="1" dur="indefinite" restart="never" nodeType="tmRoot">
-          <p:childTnLst>
-            <p:seq concurrent="1" nextAc="seek">
-              <p:cTn id="2" dur="indefinite" nodeType="mainSeq">
-                <p:childTnLst>
-                  <p:par>
-                    <p:cTn id="3" fill="hold">
-                      <p:stCondLst>
-                        <p:cond delay="indefinite"/>
-                      </p:stCondLst>
-                      <p:childTnLst>
-                        <p:par>
-                          <p:cTn id="4" fill="hold">
-                            <p:stCondLst>
-                              <p:cond delay="0"/>
-                            </p:stCondLst>
-                            <p:childTnLst>
-                              <p:par>
-                                <p:cTn id="5" presetID="1" presetClass="mediacall" presetSubtype="0" fill="hold" nodeType="clickEffect">
-                                  <p:stCondLst>
-                                    <p:cond delay="0"/>
-                                  </p:stCondLst>
-                                  <p:childTnLst>
-                                    <p:cmd type="call" cmd="playFrom(0.0)">
-                                      <p:cBhvr>
-                                        <p:cTn id="6" dur="1" fill="hold"/>
-                                        <p:tgtEl>
-                                          <p:spTgt spid="5"/>
-                                        </p:tgtEl>
-                                      </p:cBhvr>
-                                    </p:cmd>
-                                  </p:childTnLst>
-                                </p:cTn>
-                              </p:par>
-                            </p:childTnLst>
-                          </p:cTn>
-                        </p:par>
-                      </p:childTnLst>
-                    </p:cTn>
-                  </p:par>
-                </p:childTnLst>
-              </p:cTn>
-              <p:prevCondLst>
-                <p:cond evt="onPrev" delay="0">
-                  <p:tgtEl>
-                    <p:sldTgt/>
-                  </p:tgtEl>
-                </p:cond>
-              </p:prevCondLst>
-              <p:nextCondLst>
-                <p:cond evt="onNext" delay="0">
-                  <p:tgtEl>
-                    <p:sldTgt/>
-                  </p:tgtEl>
-                </p:cond>
-              </p:nextCondLst>
-            </p:seq>
-            <p:video>
-              <p:cMediaNode vol="80000">
-                <p:cTn id="7" fill="hold" display="0">
-                  <p:stCondLst>
-                    <p:cond delay="indefinite"/>
-                  </p:stCondLst>
-                </p:cTn>
-                <p:tgtEl>
-                  <p:spTgt spid="5"/>
-                </p:tgtEl>
-              </p:cMediaNode>
-            </p:video>
-            <p:seq concurrent="1" nextAc="seek">
-              <p:cTn id="8" restart="whenNotActive" fill="hold" evtFilter="cancelBubble" nodeType="interactiveSeq">
-                <p:stCondLst>
-                  <p:cond evt="onClick" delay="0">
-                    <p:tgtEl>
-                      <p:spTgt spid="5"/>
-                    </p:tgtEl>
-                  </p:cond>
-                </p:stCondLst>
-                <p:endSync evt="end" delay="0">
-                  <p:rtn val="all"/>
-                </p:endSync>
-                <p:childTnLst>
-                  <p:par>
-                    <p:cTn id="9" fill="hold">
-                      <p:stCondLst>
-                        <p:cond delay="0"/>
-                      </p:stCondLst>
-                      <p:childTnLst>
-                        <p:par>
-                          <p:cTn id="10" fill="hold">
-                            <p:stCondLst>
-                              <p:cond delay="0"/>
-                            </p:stCondLst>
-                            <p:childTnLst>
-                              <p:par>
-                                <p:cTn id="11" presetID="2" presetClass="mediacall" presetSubtype="0" fill="hold" nodeType="clickEffect">
-                                  <p:stCondLst>
-                                    <p:cond delay="0"/>
-                                  </p:stCondLst>
-                                  <p:childTnLst>
-                                    <p:cmd type="call" cmd="togglePause">
-                                      <p:cBhvr>
-                                        <p:cTn id="12" dur="1" fill="hold"/>
-                                        <p:tgtEl>
-                                          <p:spTgt spid="5"/>
-                                        </p:tgtEl>
-                                      </p:cBhvr>
-                                    </p:cmd>
-                                  </p:childTnLst>
-                                </p:cTn>
-                              </p:par>
-                            </p:childTnLst>
-                          </p:cTn>
-                        </p:par>
-                      </p:childTnLst>
-                    </p:cTn>
-                  </p:par>
-                </p:childTnLst>
-              </p:cTn>
-              <p:nextCondLst>
-                <p:cond evt="onClick" delay="0">
-                  <p:tgtEl>
-                    <p:spTgt spid="5"/>
-                  </p:tgtEl>
-                </p:cond>
-              </p:nextCondLst>
-            </p:seq>
-          </p:childTnLst>
-        </p:cTn>
-      </p:par>
-    </p:tnLst>
-  </p:timing>
-</p:sld>
-</file>
-
-<file path=ppt/slides/slide20.xml><?xml version="1.0" encoding="utf-8"?>
+<file path=ppt/slides/slide26.xml><?xml version="1.0" encoding="utf-8"?>
 <p:sld xmlns:a="http://schemas.openxmlformats.org/drawingml/2006/main" xmlns:r="http://schemas.openxmlformats.org/officeDocument/2006/relationships" xmlns:p="http://schemas.openxmlformats.org/presentationml/2006/main">
   <p:cSld>
     <p:spTree>
@@ -53353,12 +54492,18 @@
 </p:sld>
 </file>
 
-<file path=ppt/slides/slide21.xml><?xml version="1.0" encoding="utf-8"?>
+<file path=ppt/slides/slide27.xml><?xml version="1.0" encoding="utf-8"?>
 <p:sld xmlns:a="http://schemas.openxmlformats.org/drawingml/2006/main" xmlns:r="http://schemas.openxmlformats.org/officeDocument/2006/relationships" xmlns:p="http://schemas.openxmlformats.org/presentationml/2006/main">
   <p:cSld>
     <p:spTree>
       <p:nvGrpSpPr>
-        <p:cNvPr id="1" name=""/>
+        <p:cNvPr id="1" name="">
+          <a:extLst>
+            <a:ext uri="{FF2B5EF4-FFF2-40B4-BE49-F238E27FC236}">
+              <a16:creationId xmlns:a16="http://schemas.microsoft.com/office/drawing/2014/main" id="{7E1384FB-2C69-A8E3-E442-BE42258A02A8}"/>
+            </a:ext>
+          </a:extLst>
+        </p:cNvPr>
         <p:cNvGrpSpPr/>
         <p:nvPr/>
       </p:nvGrpSpPr>
@@ -53372,10 +54517,10 @@
       </p:grpSpPr>
       <p:sp>
         <p:nvSpPr>
-          <p:cNvPr id="7" name="Title 6">
-            <a:extLst>
-              <a:ext uri="{FF2B5EF4-FFF2-40B4-BE49-F238E27FC236}">
-                <a16:creationId xmlns:a16="http://schemas.microsoft.com/office/drawing/2014/main" id="{A0A79DFE-CA6D-199F-1D8F-0A25E480F345}"/>
+          <p:cNvPr id="5" name="Title 4">
+            <a:extLst>
+              <a:ext uri="{FF2B5EF4-FFF2-40B4-BE49-F238E27FC236}">
+                <a16:creationId xmlns:a16="http://schemas.microsoft.com/office/drawing/2014/main" id="{F4F99B34-E59F-DCDA-350C-4434D1D9E290}"/>
               </a:ext>
             </a:extLst>
           </p:cNvPr>
@@ -53393,17 +54538,17 @@
           <a:p>
             <a:r>
               <a:rPr lang="en-US" dirty="0"/>
-              <a:t>Hands-On #1</a:t>
-            </a:r>
-          </a:p>
-        </p:txBody>
-      </p:sp>
-      <p:sp>
-        <p:nvSpPr>
-          <p:cNvPr id="8" name="Content Placeholder 7">
-            <a:extLst>
-              <a:ext uri="{FF2B5EF4-FFF2-40B4-BE49-F238E27FC236}">
-                <a16:creationId xmlns:a16="http://schemas.microsoft.com/office/drawing/2014/main" id="{0C8DBF7A-ABA5-7245-19D0-84C717D30964}"/>
+              <a:t>Hands-On #2 in PYTHON_FILE_IO.MD</a:t>
+            </a:r>
+          </a:p>
+        </p:txBody>
+      </p:sp>
+      <p:sp>
+        <p:nvSpPr>
+          <p:cNvPr id="6" name="Content Placeholder 5">
+            <a:extLst>
+              <a:ext uri="{FF2B5EF4-FFF2-40B4-BE49-F238E27FC236}">
+                <a16:creationId xmlns:a16="http://schemas.microsoft.com/office/drawing/2014/main" id="{6E3149CB-0F5D-FA16-37DF-A43A5D8A122E}"/>
               </a:ext>
             </a:extLst>
           </p:cNvPr>
@@ -53421,18 +54566,15 @@
           <a:p>
             <a:r>
               <a:rPr lang="en-US" dirty="0"/>
-              <a:t>Navigating file structures with python</a:t>
-            </a:r>
-          </a:p>
-          <a:p>
-            <a:endParaRPr lang="en-US" dirty="0"/>
+              <a:t>Manipulate files in python</a:t>
+            </a:r>
           </a:p>
         </p:txBody>
       </p:sp>
     </p:spTree>
     <p:extLst>
       <p:ext uri="{BB962C8B-B14F-4D97-AF65-F5344CB8AC3E}">
-        <p14:creationId xmlns:p14="http://schemas.microsoft.com/office/powerpoint/2010/main" val="4018436934"/>
+        <p14:creationId xmlns:p14="http://schemas.microsoft.com/office/powerpoint/2010/main" val="4267263404"/>
       </p:ext>
     </p:extLst>
   </p:cSld>
@@ -53442,1215 +54584,7 @@
 </p:sld>
 </file>
 
-<file path=ppt/slides/slide22.xml><?xml version="1.0" encoding="utf-8"?>
-<p:sld xmlns:a="http://schemas.openxmlformats.org/drawingml/2006/main" xmlns:r="http://schemas.openxmlformats.org/officeDocument/2006/relationships" xmlns:p="http://schemas.openxmlformats.org/presentationml/2006/main">
-  <p:cSld>
-    <p:spTree>
-      <p:nvGrpSpPr>
-        <p:cNvPr id="1" name=""/>
-        <p:cNvGrpSpPr/>
-        <p:nvPr/>
-      </p:nvGrpSpPr>
-      <p:grpSpPr>
-        <a:xfrm>
-          <a:off x="0" y="0"/>
-          <a:ext cx="0" cy="0"/>
-          <a:chOff x="0" y="0"/>
-          <a:chExt cx="0" cy="0"/>
-        </a:xfrm>
-      </p:grpSpPr>
-      <p:sp>
-        <p:nvSpPr>
-          <p:cNvPr id="2" name="Title 1">
-            <a:extLst>
-              <a:ext uri="{FF2B5EF4-FFF2-40B4-BE49-F238E27FC236}">
-                <a16:creationId xmlns:a16="http://schemas.microsoft.com/office/drawing/2014/main" id="{3469CDD8-6080-6002-43DF-A45AE5E3FD8C}"/>
-              </a:ext>
-            </a:extLst>
-          </p:cNvPr>
-          <p:cNvSpPr>
-            <a:spLocks noGrp="1"/>
-          </p:cNvSpPr>
-          <p:nvPr>
-            <p:ph type="title"/>
-          </p:nvPr>
-        </p:nvSpPr>
-        <p:spPr/>
-        <p:txBody>
-          <a:bodyPr/>
-          <a:lstStyle/>
-          <a:p>
-            <a:r>
-              <a:rPr lang="en-US" dirty="0"/>
-              <a:t>Manipulating files</a:t>
-            </a:r>
-          </a:p>
-        </p:txBody>
-      </p:sp>
-      <p:sp>
-        <p:nvSpPr>
-          <p:cNvPr id="3" name="Text Placeholder 2">
-            <a:extLst>
-              <a:ext uri="{FF2B5EF4-FFF2-40B4-BE49-F238E27FC236}">
-                <a16:creationId xmlns:a16="http://schemas.microsoft.com/office/drawing/2014/main" id="{ED48EDCE-F294-B711-19E1-CC0FFC24F34E}"/>
-              </a:ext>
-            </a:extLst>
-          </p:cNvPr>
-          <p:cNvSpPr>
-            <a:spLocks noGrp="1"/>
-          </p:cNvSpPr>
-          <p:nvPr>
-            <p:ph type="body" sz="quarter" idx="11"/>
-          </p:nvPr>
-        </p:nvSpPr>
-        <p:spPr/>
-        <p:txBody>
-          <a:bodyPr/>
-          <a:lstStyle/>
-          <a:p>
-            <a:endParaRPr lang="en-US"/>
-          </a:p>
-        </p:txBody>
-      </p:sp>
-      <p:pic>
-        <p:nvPicPr>
-          <p:cNvPr id="6" name="Content Placeholder 5">
-            <a:extLst>
-              <a:ext uri="{FF2B5EF4-FFF2-40B4-BE49-F238E27FC236}">
-                <a16:creationId xmlns:a16="http://schemas.microsoft.com/office/drawing/2014/main" id="{242163BC-A88E-CDCA-639D-5B3C8DC3E870}"/>
-              </a:ext>
-            </a:extLst>
-          </p:cNvPr>
-          <p:cNvPicPr>
-            <a:picLocks noGrp="1" noChangeAspect="1"/>
-          </p:cNvPicPr>
-          <p:nvPr>
-            <p:ph idx="4294967295"/>
-          </p:nvPr>
-        </p:nvPicPr>
-        <p:blipFill>
-          <a:blip r:embed="rId2"/>
-          <a:stretch>
-            <a:fillRect/>
-          </a:stretch>
-        </p:blipFill>
-        <p:spPr>
-          <a:xfrm>
-            <a:off x="0" y="1108957"/>
-            <a:ext cx="7466275" cy="5058481"/>
-          </a:xfrm>
-        </p:spPr>
-      </p:pic>
-    </p:spTree>
-    <p:extLst>
-      <p:ext uri="{BB962C8B-B14F-4D97-AF65-F5344CB8AC3E}">
-        <p14:creationId xmlns:p14="http://schemas.microsoft.com/office/powerpoint/2010/main" val="2862347507"/>
-      </p:ext>
-    </p:extLst>
-  </p:cSld>
-  <p:clrMapOvr>
-    <a:masterClrMapping/>
-  </p:clrMapOvr>
-</p:sld>
-</file>
-
-<file path=ppt/slides/slide23.xml><?xml version="1.0" encoding="utf-8"?>
-<p:sld xmlns:a="http://schemas.openxmlformats.org/drawingml/2006/main" xmlns:r="http://schemas.openxmlformats.org/officeDocument/2006/relationships" xmlns:p="http://schemas.openxmlformats.org/presentationml/2006/main">
-  <p:cSld>
-    <p:spTree>
-      <p:nvGrpSpPr>
-        <p:cNvPr id="1" name=""/>
-        <p:cNvGrpSpPr/>
-        <p:nvPr/>
-      </p:nvGrpSpPr>
-      <p:grpSpPr>
-        <a:xfrm>
-          <a:off x="0" y="0"/>
-          <a:ext cx="0" cy="0"/>
-          <a:chOff x="0" y="0"/>
-          <a:chExt cx="0" cy="0"/>
-        </a:xfrm>
-      </p:grpSpPr>
-      <p:sp>
-        <p:nvSpPr>
-          <p:cNvPr id="5" name="Title 4">
-            <a:extLst>
-              <a:ext uri="{FF2B5EF4-FFF2-40B4-BE49-F238E27FC236}">
-                <a16:creationId xmlns:a16="http://schemas.microsoft.com/office/drawing/2014/main" id="{9E909A96-B147-C0B7-6931-24BF30567220}"/>
-              </a:ext>
-            </a:extLst>
-          </p:cNvPr>
-          <p:cNvSpPr>
-            <a:spLocks noGrp="1"/>
-          </p:cNvSpPr>
-          <p:nvPr>
-            <p:ph type="title"/>
-          </p:nvPr>
-        </p:nvSpPr>
-        <p:spPr/>
-        <p:txBody>
-          <a:bodyPr/>
-          <a:lstStyle/>
-          <a:p>
-            <a:r>
-              <a:rPr lang="en-US" dirty="0"/>
-              <a:t>Common Actions</a:t>
-            </a:r>
-          </a:p>
-        </p:txBody>
-      </p:sp>
-      <p:graphicFrame>
-        <p:nvGraphicFramePr>
-          <p:cNvPr id="7" name="Content Placeholder 6">
-            <a:extLst>
-              <a:ext uri="{FF2B5EF4-FFF2-40B4-BE49-F238E27FC236}">
-                <a16:creationId xmlns:a16="http://schemas.microsoft.com/office/drawing/2014/main" id="{1388E7BE-1112-2D62-6248-B7586DC811DD}"/>
-              </a:ext>
-            </a:extLst>
-          </p:cNvPr>
-          <p:cNvGraphicFramePr>
-            <a:graphicFrameLocks noGrp="1"/>
-          </p:cNvGraphicFramePr>
-          <p:nvPr>
-            <p:ph idx="4294967295"/>
-            <p:extLst>
-              <p:ext uri="{D42A27DB-BD31-4B8C-83A1-F6EECF244321}">
-                <p14:modId xmlns:p14="http://schemas.microsoft.com/office/powerpoint/2010/main" val="3099997113"/>
-              </p:ext>
-            </p:extLst>
-          </p:nvPr>
-        </p:nvGraphicFramePr>
-        <p:xfrm>
-          <a:off x="2250219" y="1529317"/>
-          <a:ext cx="6762941" cy="4355832"/>
-        </p:xfrm>
-        <a:graphic>
-          <a:graphicData uri="http://schemas.openxmlformats.org/drawingml/2006/table">
-            <a:tbl>
-              <a:tblPr/>
-              <a:tblGrid>
-                <a:gridCol w="2631882">
-                  <a:extLst>
-                    <a:ext uri="{9D8B030D-6E8A-4147-A177-3AD203B41FA5}">
-                      <a16:colId xmlns:a16="http://schemas.microsoft.com/office/drawing/2014/main" val="3937651176"/>
-                    </a:ext>
-                  </a:extLst>
-                </a:gridCol>
-                <a:gridCol w="4131059">
-                  <a:extLst>
-                    <a:ext uri="{9D8B030D-6E8A-4147-A177-3AD203B41FA5}">
-                      <a16:colId xmlns:a16="http://schemas.microsoft.com/office/drawing/2014/main" val="2019659395"/>
-                    </a:ext>
-                  </a:extLst>
-                </a:gridCol>
-              </a:tblGrid>
-              <a:tr h="334718">
-                <a:tc>
-                  <a:txBody>
-                    <a:bodyPr/>
-                    <a:lstStyle/>
-                    <a:p>
-                      <a:pPr>
-                        <a:buNone/>
-                      </a:pPr>
-                      <a:r>
-                        <a:rPr lang="en-US" sz="1600" b="1" dirty="0"/>
-                        <a:t>Operation</a:t>
-                      </a:r>
-                    </a:p>
-                  </a:txBody>
-                  <a:tcPr marL="54069" marR="54069" marT="41840" marB="41840" anchor="ctr">
-                    <a:lnL>
-                      <a:noFill/>
-                    </a:lnL>
-                    <a:lnR>
-                      <a:noFill/>
-                    </a:lnR>
-                    <a:lnT>
-                      <a:noFill/>
-                    </a:lnT>
-                    <a:lnB>
-                      <a:noFill/>
-                    </a:lnB>
-                    <a:noFill/>
-                  </a:tcPr>
-                </a:tc>
-                <a:tc>
-                  <a:txBody>
-                    <a:bodyPr/>
-                    <a:lstStyle/>
-                    <a:p>
-                      <a:pPr>
-                        <a:buNone/>
-                      </a:pPr>
-                      <a:r>
-                        <a:rPr lang="en-US" sz="1600" b="1" dirty="0"/>
-                        <a:t>Description</a:t>
-                      </a:r>
-                    </a:p>
-                  </a:txBody>
-                  <a:tcPr marL="54069" marR="54069" marT="41840" marB="41840" anchor="ctr">
-                    <a:lnL>
-                      <a:noFill/>
-                    </a:lnL>
-                    <a:lnR>
-                      <a:noFill/>
-                    </a:lnR>
-                    <a:lnT>
-                      <a:noFill/>
-                    </a:lnT>
-                    <a:lnB>
-                      <a:noFill/>
-                    </a:lnB>
-                    <a:noFill/>
-                  </a:tcPr>
-                </a:tc>
-                <a:extLst>
-                  <a:ext uri="{0D108BD9-81ED-4DB2-BD59-A6C34878D82A}">
-                    <a16:rowId xmlns:a16="http://schemas.microsoft.com/office/drawing/2014/main" val="2888546582"/>
-                  </a:ext>
-                </a:extLst>
-              </a:tr>
-              <a:tr h="585757">
-                <a:tc>
-                  <a:txBody>
-                    <a:bodyPr/>
-                    <a:lstStyle/>
-                    <a:p>
-                      <a:pPr>
-                        <a:buNone/>
-                      </a:pPr>
-                      <a:r>
-                        <a:rPr lang="en-US" sz="1600" dirty="0">
-                          <a:solidFill>
-                            <a:schemeClr val="tx2"/>
-                          </a:solidFill>
-                          <a:latin typeface="Consolas" panose="020B0609020204030204" pitchFamily="49" charset="0"/>
-                          <a:cs typeface="Courier New" panose="02070309020205020404" pitchFamily="49" charset="0"/>
-                        </a:rPr>
-                        <a:t>with open('file.txt', 'r') as f:</a:t>
-                      </a:r>
-                      <a:br>
-                        <a:rPr lang="en-US" sz="1600" dirty="0">
-                          <a:solidFill>
-                            <a:schemeClr val="tx2"/>
-                          </a:solidFill>
-                          <a:latin typeface="Consolas" panose="020B0609020204030204" pitchFamily="49" charset="0"/>
-                          <a:cs typeface="Courier New" panose="02070309020205020404" pitchFamily="49" charset="0"/>
-                        </a:rPr>
-                      </a:br>
-                      <a:r>
-                        <a:rPr lang="en-US" sz="1600" dirty="0">
-                          <a:solidFill>
-                            <a:schemeClr val="tx2"/>
-                          </a:solidFill>
-                          <a:latin typeface="Consolas" panose="020B0609020204030204" pitchFamily="49" charset="0"/>
-                          <a:cs typeface="Courier New" panose="02070309020205020404" pitchFamily="49" charset="0"/>
-                        </a:rPr>
-                        <a:t>  pass</a:t>
-                      </a:r>
-                    </a:p>
-                  </a:txBody>
-                  <a:tcPr marL="54069" marR="54069" marT="41840" marB="41840" anchor="ctr">
-                    <a:lnL>
-                      <a:noFill/>
-                    </a:lnL>
-                    <a:lnR>
-                      <a:noFill/>
-                    </a:lnR>
-                    <a:lnT>
-                      <a:noFill/>
-                    </a:lnT>
-                    <a:lnB>
-                      <a:noFill/>
-                    </a:lnB>
-                    <a:noFill/>
-                  </a:tcPr>
-                </a:tc>
-                <a:tc>
-                  <a:txBody>
-                    <a:bodyPr/>
-                    <a:lstStyle/>
-                    <a:p>
-                      <a:pPr>
-                        <a:buNone/>
-                      </a:pPr>
-                      <a:r>
-                        <a:rPr lang="en-US" sz="1600" dirty="0"/>
-                        <a:t>Prepare a file for reading</a:t>
-                      </a:r>
-                    </a:p>
-                  </a:txBody>
-                  <a:tcPr marL="54069" marR="54069" marT="41840" marB="41840" anchor="ctr">
-                    <a:lnL>
-                      <a:noFill/>
-                    </a:lnL>
-                    <a:lnR>
-                      <a:noFill/>
-                    </a:lnR>
-                    <a:lnT>
-                      <a:noFill/>
-                    </a:lnT>
-                    <a:lnB>
-                      <a:noFill/>
-                    </a:lnB>
-                    <a:noFill/>
-                  </a:tcPr>
-                </a:tc>
-                <a:extLst>
-                  <a:ext uri="{0D108BD9-81ED-4DB2-BD59-A6C34878D82A}">
-                    <a16:rowId xmlns:a16="http://schemas.microsoft.com/office/drawing/2014/main" val="2516975046"/>
-                  </a:ext>
-                </a:extLst>
-              </a:tr>
-              <a:tr h="334718">
-                <a:tc>
-                  <a:txBody>
-                    <a:bodyPr/>
-                    <a:lstStyle/>
-                    <a:p>
-                      <a:pPr>
-                        <a:buNone/>
-                      </a:pPr>
-                      <a:r>
-                        <a:rPr lang="en-US" sz="1600" dirty="0" err="1">
-                          <a:solidFill>
-                            <a:schemeClr val="tx2"/>
-                          </a:solidFill>
-                          <a:latin typeface="Consolas" panose="020B0609020204030204" pitchFamily="49" charset="0"/>
-                          <a:cs typeface="Courier New" panose="02070309020205020404" pitchFamily="49" charset="0"/>
-                        </a:rPr>
-                        <a:t>f.read</a:t>
-                      </a:r>
-                      <a:r>
-                        <a:rPr lang="en-US" sz="1600" dirty="0">
-                          <a:solidFill>
-                            <a:schemeClr val="tx2"/>
-                          </a:solidFill>
-                          <a:latin typeface="Consolas" panose="020B0609020204030204" pitchFamily="49" charset="0"/>
-                          <a:cs typeface="Courier New" panose="02070309020205020404" pitchFamily="49" charset="0"/>
-                        </a:rPr>
-                        <a:t>()</a:t>
-                      </a:r>
-                    </a:p>
-                  </a:txBody>
-                  <a:tcPr marL="54069" marR="54069" marT="41840" marB="41840" anchor="ctr">
-                    <a:lnL>
-                      <a:noFill/>
-                    </a:lnL>
-                    <a:lnR>
-                      <a:noFill/>
-                    </a:lnR>
-                    <a:lnT>
-                      <a:noFill/>
-                    </a:lnT>
-                    <a:lnB>
-                      <a:noFill/>
-                    </a:lnB>
-                    <a:noFill/>
-                  </a:tcPr>
-                </a:tc>
-                <a:tc>
-                  <a:txBody>
-                    <a:bodyPr/>
-                    <a:lstStyle/>
-                    <a:p>
-                      <a:pPr>
-                        <a:buNone/>
-                      </a:pPr>
-                      <a:r>
-                        <a:rPr lang="en-US" sz="1600"/>
-                        <a:t>Read entire file as a string</a:t>
-                      </a:r>
-                    </a:p>
-                  </a:txBody>
-                  <a:tcPr marL="54069" marR="54069" marT="41840" marB="41840" anchor="ctr">
-                    <a:lnL>
-                      <a:noFill/>
-                    </a:lnL>
-                    <a:lnR>
-                      <a:noFill/>
-                    </a:lnR>
-                    <a:lnT>
-                      <a:noFill/>
-                    </a:lnT>
-                    <a:lnB>
-                      <a:noFill/>
-                    </a:lnB>
-                    <a:noFill/>
-                  </a:tcPr>
-                </a:tc>
-                <a:extLst>
-                  <a:ext uri="{0D108BD9-81ED-4DB2-BD59-A6C34878D82A}">
-                    <a16:rowId xmlns:a16="http://schemas.microsoft.com/office/drawing/2014/main" val="1359915918"/>
-                  </a:ext>
-                </a:extLst>
-              </a:tr>
-              <a:tr h="334718">
-                <a:tc>
-                  <a:txBody>
-                    <a:bodyPr/>
-                    <a:lstStyle/>
-                    <a:p>
-                      <a:pPr>
-                        <a:buNone/>
-                      </a:pPr>
-                      <a:r>
-                        <a:rPr lang="en-US" sz="1600" dirty="0" err="1">
-                          <a:solidFill>
-                            <a:schemeClr val="tx2"/>
-                          </a:solidFill>
-                          <a:latin typeface="Consolas" panose="020B0609020204030204" pitchFamily="49" charset="0"/>
-                          <a:cs typeface="Courier New" panose="02070309020205020404" pitchFamily="49" charset="0"/>
-                        </a:rPr>
-                        <a:t>f.readlines</a:t>
-                      </a:r>
-                      <a:r>
-                        <a:rPr lang="en-US" sz="1600" dirty="0">
-                          <a:solidFill>
-                            <a:schemeClr val="tx2"/>
-                          </a:solidFill>
-                          <a:latin typeface="Consolas" panose="020B0609020204030204" pitchFamily="49" charset="0"/>
-                          <a:cs typeface="Courier New" panose="02070309020205020404" pitchFamily="49" charset="0"/>
-                        </a:rPr>
-                        <a:t>()</a:t>
-                      </a:r>
-                    </a:p>
-                  </a:txBody>
-                  <a:tcPr marL="54069" marR="54069" marT="41840" marB="41840" anchor="ctr">
-                    <a:lnL>
-                      <a:noFill/>
-                    </a:lnL>
-                    <a:lnR>
-                      <a:noFill/>
-                    </a:lnR>
-                    <a:lnT>
-                      <a:noFill/>
-                    </a:lnT>
-                    <a:lnB>
-                      <a:noFill/>
-                    </a:lnB>
-                    <a:noFill/>
-                  </a:tcPr>
-                </a:tc>
-                <a:tc>
-                  <a:txBody>
-                    <a:bodyPr/>
-                    <a:lstStyle/>
-                    <a:p>
-                      <a:pPr>
-                        <a:buNone/>
-                      </a:pPr>
-                      <a:r>
-                        <a:rPr lang="en-US" sz="1600"/>
-                        <a:t>Read file line by line into a list</a:t>
-                      </a:r>
-                    </a:p>
-                  </a:txBody>
-                  <a:tcPr marL="54069" marR="54069" marT="41840" marB="41840" anchor="ctr">
-                    <a:lnL>
-                      <a:noFill/>
-                    </a:lnL>
-                    <a:lnR>
-                      <a:noFill/>
-                    </a:lnR>
-                    <a:lnT>
-                      <a:noFill/>
-                    </a:lnT>
-                    <a:lnB>
-                      <a:noFill/>
-                    </a:lnB>
-                    <a:noFill/>
-                  </a:tcPr>
-                </a:tc>
-                <a:extLst>
-                  <a:ext uri="{0D108BD9-81ED-4DB2-BD59-A6C34878D82A}">
-                    <a16:rowId xmlns:a16="http://schemas.microsoft.com/office/drawing/2014/main" val="1233964758"/>
-                  </a:ext>
-                </a:extLst>
-              </a:tr>
-              <a:tr h="334718">
-                <a:tc>
-                  <a:txBody>
-                    <a:bodyPr/>
-                    <a:lstStyle/>
-                    <a:p>
-                      <a:pPr>
-                        <a:buNone/>
-                      </a:pPr>
-                      <a:r>
-                        <a:rPr lang="en-US" sz="1600" dirty="0">
-                          <a:solidFill>
-                            <a:schemeClr val="tx2"/>
-                          </a:solidFill>
-                          <a:latin typeface="Consolas" panose="020B0609020204030204" pitchFamily="49" charset="0"/>
-                          <a:cs typeface="Courier New" panose="02070309020205020404" pitchFamily="49" charset="0"/>
-                        </a:rPr>
-                        <a:t>for line in f:</a:t>
-                      </a:r>
-                    </a:p>
-                    <a:p>
-                      <a:pPr>
-                        <a:buNone/>
-                      </a:pPr>
-                      <a:r>
-                        <a:rPr lang="en-US" sz="1600" dirty="0">
-                          <a:solidFill>
-                            <a:schemeClr val="tx2"/>
-                          </a:solidFill>
-                          <a:latin typeface="Consolas" panose="020B0609020204030204" pitchFamily="49" charset="0"/>
-                          <a:cs typeface="Courier New" panose="02070309020205020404" pitchFamily="49" charset="0"/>
-                        </a:rPr>
-                        <a:t>  pass</a:t>
-                      </a:r>
-                    </a:p>
-                  </a:txBody>
-                  <a:tcPr marL="54069" marR="54069" marT="41840" marB="41840" anchor="ctr">
-                    <a:lnL>
-                      <a:noFill/>
-                    </a:lnL>
-                    <a:lnR>
-                      <a:noFill/>
-                    </a:lnR>
-                    <a:lnT>
-                      <a:noFill/>
-                    </a:lnT>
-                    <a:lnB>
-                      <a:noFill/>
-                    </a:lnB>
-                    <a:noFill/>
-                  </a:tcPr>
-                </a:tc>
-                <a:tc>
-                  <a:txBody>
-                    <a:bodyPr/>
-                    <a:lstStyle/>
-                    <a:p>
-                      <a:pPr>
-                        <a:buNone/>
-                      </a:pPr>
-                      <a:r>
-                        <a:rPr lang="en-US" sz="1600" dirty="0"/>
-                        <a:t>Loop through file line by line</a:t>
-                      </a:r>
-                    </a:p>
-                  </a:txBody>
-                  <a:tcPr marL="54069" marR="54069" marT="41840" marB="41840" anchor="ctr">
-                    <a:lnL>
-                      <a:noFill/>
-                    </a:lnL>
-                    <a:lnR>
-                      <a:noFill/>
-                    </a:lnR>
-                    <a:lnT>
-                      <a:noFill/>
-                    </a:lnT>
-                    <a:lnB>
-                      <a:noFill/>
-                    </a:lnB>
-                    <a:noFill/>
-                  </a:tcPr>
-                </a:tc>
-                <a:extLst>
-                  <a:ext uri="{0D108BD9-81ED-4DB2-BD59-A6C34878D82A}">
-                    <a16:rowId xmlns:a16="http://schemas.microsoft.com/office/drawing/2014/main" val="4106517580"/>
-                  </a:ext>
-                </a:extLst>
-              </a:tr>
-              <a:tr h="585757">
-                <a:tc>
-                  <a:txBody>
-                    <a:bodyPr/>
-                    <a:lstStyle/>
-                    <a:p>
-                      <a:pPr>
-                        <a:buNone/>
-                      </a:pPr>
-                      <a:r>
-                        <a:rPr lang="en-US" sz="1600" dirty="0">
-                          <a:solidFill>
-                            <a:schemeClr val="tx2"/>
-                          </a:solidFill>
-                          <a:latin typeface="Consolas" panose="020B0609020204030204" pitchFamily="49" charset="0"/>
-                          <a:cs typeface="Courier New" panose="02070309020205020404" pitchFamily="49" charset="0"/>
-                        </a:rPr>
-                        <a:t>with open('file.txt', 'w') as f:</a:t>
-                      </a:r>
-                      <a:br>
-                        <a:rPr lang="en-US" sz="1600" dirty="0">
-                          <a:solidFill>
-                            <a:schemeClr val="tx2"/>
-                          </a:solidFill>
-                          <a:latin typeface="Consolas" panose="020B0609020204030204" pitchFamily="49" charset="0"/>
-                          <a:cs typeface="Courier New" panose="02070309020205020404" pitchFamily="49" charset="0"/>
-                        </a:rPr>
-                      </a:br>
-                      <a:r>
-                        <a:rPr lang="en-US" sz="1600" dirty="0">
-                          <a:solidFill>
-                            <a:schemeClr val="tx2"/>
-                          </a:solidFill>
-                          <a:latin typeface="Consolas" panose="020B0609020204030204" pitchFamily="49" charset="0"/>
-                          <a:cs typeface="Courier New" panose="02070309020205020404" pitchFamily="49" charset="0"/>
-                        </a:rPr>
-                        <a:t>  </a:t>
-                      </a:r>
-                      <a:r>
-                        <a:rPr lang="en-US" sz="1600" dirty="0" err="1">
-                          <a:solidFill>
-                            <a:schemeClr val="tx2"/>
-                          </a:solidFill>
-                          <a:latin typeface="Consolas" panose="020B0609020204030204" pitchFamily="49" charset="0"/>
-                          <a:cs typeface="Courier New" panose="02070309020205020404" pitchFamily="49" charset="0"/>
-                        </a:rPr>
-                        <a:t>f.write</a:t>
-                      </a:r>
-                      <a:r>
-                        <a:rPr lang="en-US" sz="1600" dirty="0">
-                          <a:solidFill>
-                            <a:schemeClr val="tx2"/>
-                          </a:solidFill>
-                          <a:latin typeface="Consolas" panose="020B0609020204030204" pitchFamily="49" charset="0"/>
-                          <a:cs typeface="Courier New" panose="02070309020205020404" pitchFamily="49" charset="0"/>
-                        </a:rPr>
-                        <a:t>()</a:t>
-                      </a:r>
-                    </a:p>
-                  </a:txBody>
-                  <a:tcPr marL="54069" marR="54069" marT="41840" marB="41840" anchor="ctr">
-                    <a:lnL>
-                      <a:noFill/>
-                    </a:lnL>
-                    <a:lnR>
-                      <a:noFill/>
-                    </a:lnR>
-                    <a:lnT>
-                      <a:noFill/>
-                    </a:lnT>
-                    <a:lnB>
-                      <a:noFill/>
-                    </a:lnB>
-                    <a:noFill/>
-                  </a:tcPr>
-                </a:tc>
-                <a:tc>
-                  <a:txBody>
-                    <a:bodyPr/>
-                    <a:lstStyle/>
-                    <a:p>
-                      <a:pPr>
-                        <a:buNone/>
-                      </a:pPr>
-                      <a:r>
-                        <a:rPr lang="en-US" sz="1600"/>
-                        <a:t>Overwrite with new content</a:t>
-                      </a:r>
-                    </a:p>
-                  </a:txBody>
-                  <a:tcPr marL="54069" marR="54069" marT="41840" marB="41840" anchor="ctr">
-                    <a:lnL>
-                      <a:noFill/>
-                    </a:lnL>
-                    <a:lnR>
-                      <a:noFill/>
-                    </a:lnR>
-                    <a:lnT>
-                      <a:noFill/>
-                    </a:lnT>
-                    <a:lnB>
-                      <a:noFill/>
-                    </a:lnB>
-                    <a:noFill/>
-                  </a:tcPr>
-                </a:tc>
-                <a:extLst>
-                  <a:ext uri="{0D108BD9-81ED-4DB2-BD59-A6C34878D82A}">
-                    <a16:rowId xmlns:a16="http://schemas.microsoft.com/office/drawing/2014/main" val="1274082115"/>
-                  </a:ext>
-                </a:extLst>
-              </a:tr>
-              <a:tr h="585757">
-                <a:tc>
-                  <a:txBody>
-                    <a:bodyPr/>
-                    <a:lstStyle/>
-                    <a:p>
-                      <a:pPr>
-                        <a:buNone/>
-                      </a:pPr>
-                      <a:r>
-                        <a:rPr lang="en-US" sz="1600" dirty="0">
-                          <a:solidFill>
-                            <a:schemeClr val="tx2"/>
-                          </a:solidFill>
-                          <a:latin typeface="Consolas" panose="020B0609020204030204" pitchFamily="49" charset="0"/>
-                          <a:cs typeface="Courier New" panose="02070309020205020404" pitchFamily="49" charset="0"/>
-                        </a:rPr>
-                        <a:t>with open('file.txt', 'a') as f:</a:t>
-                      </a:r>
-                      <a:br>
-                        <a:rPr lang="en-US" sz="1600" dirty="0">
-                          <a:solidFill>
-                            <a:schemeClr val="tx2"/>
-                          </a:solidFill>
-                          <a:latin typeface="Consolas" panose="020B0609020204030204" pitchFamily="49" charset="0"/>
-                          <a:cs typeface="Courier New" panose="02070309020205020404" pitchFamily="49" charset="0"/>
-                        </a:rPr>
-                      </a:br>
-                      <a:r>
-                        <a:rPr lang="en-US" sz="1600" dirty="0">
-                          <a:solidFill>
-                            <a:schemeClr val="tx2"/>
-                          </a:solidFill>
-                          <a:latin typeface="Consolas" panose="020B0609020204030204" pitchFamily="49" charset="0"/>
-                          <a:cs typeface="Courier New" panose="02070309020205020404" pitchFamily="49" charset="0"/>
-                        </a:rPr>
-                        <a:t>  pass</a:t>
-                      </a:r>
-                    </a:p>
-                  </a:txBody>
-                  <a:tcPr marL="54069" marR="54069" marT="41840" marB="41840" anchor="ctr">
-                    <a:lnL>
-                      <a:noFill/>
-                    </a:lnL>
-                    <a:lnR>
-                      <a:noFill/>
-                    </a:lnR>
-                    <a:lnT>
-                      <a:noFill/>
-                    </a:lnT>
-                    <a:lnB>
-                      <a:noFill/>
-                    </a:lnB>
-                    <a:noFill/>
-                  </a:tcPr>
-                </a:tc>
-                <a:tc>
-                  <a:txBody>
-                    <a:bodyPr/>
-                    <a:lstStyle/>
-                    <a:p>
-                      <a:pPr>
-                        <a:buNone/>
-                      </a:pPr>
-                      <a:r>
-                        <a:rPr lang="en-US" sz="1600" dirty="0"/>
-                        <a:t>Add content to end without erasing existing</a:t>
-                      </a:r>
-                    </a:p>
-                  </a:txBody>
-                  <a:tcPr marL="54069" marR="54069" marT="41840" marB="41840" anchor="ctr">
-                    <a:lnL>
-                      <a:noFill/>
-                    </a:lnL>
-                    <a:lnR>
-                      <a:noFill/>
-                    </a:lnR>
-                    <a:lnT>
-                      <a:noFill/>
-                    </a:lnT>
-                    <a:lnB>
-                      <a:noFill/>
-                    </a:lnB>
-                    <a:noFill/>
-                  </a:tcPr>
-                </a:tc>
-                <a:extLst>
-                  <a:ext uri="{0D108BD9-81ED-4DB2-BD59-A6C34878D82A}">
-                    <a16:rowId xmlns:a16="http://schemas.microsoft.com/office/drawing/2014/main" val="590201874"/>
-                  </a:ext>
-                </a:extLst>
-              </a:tr>
-              <a:tr h="334718">
-                <a:tc>
-                  <a:txBody>
-                    <a:bodyPr/>
-                    <a:lstStyle/>
-                    <a:p>
-                      <a:pPr>
-                        <a:buNone/>
-                      </a:pPr>
-                      <a:r>
-                        <a:rPr lang="en-US" sz="1600" dirty="0" err="1">
-                          <a:solidFill>
-                            <a:schemeClr val="tx2"/>
-                          </a:solidFill>
-                          <a:latin typeface="Consolas" panose="020B0609020204030204" pitchFamily="49" charset="0"/>
-                          <a:cs typeface="Courier New" panose="02070309020205020404" pitchFamily="49" charset="0"/>
-                        </a:rPr>
-                        <a:t>f.writelines</a:t>
-                      </a:r>
-                      <a:r>
-                        <a:rPr lang="en-US" sz="1600" dirty="0">
-                          <a:solidFill>
-                            <a:schemeClr val="tx2"/>
-                          </a:solidFill>
-                          <a:latin typeface="Consolas" panose="020B0609020204030204" pitchFamily="49" charset="0"/>
-                          <a:cs typeface="Courier New" panose="02070309020205020404" pitchFamily="49" charset="0"/>
-                        </a:rPr>
-                        <a:t>(lines)</a:t>
-                      </a:r>
-                    </a:p>
-                  </a:txBody>
-                  <a:tcPr marL="54069" marR="54069" marT="41840" marB="41840" anchor="ctr">
-                    <a:lnL>
-                      <a:noFill/>
-                    </a:lnL>
-                    <a:lnR>
-                      <a:noFill/>
-                    </a:lnR>
-                    <a:lnT>
-                      <a:noFill/>
-                    </a:lnT>
-                    <a:lnB>
-                      <a:noFill/>
-                    </a:lnB>
-                    <a:noFill/>
-                  </a:tcPr>
-                </a:tc>
-                <a:tc>
-                  <a:txBody>
-                    <a:bodyPr/>
-                    <a:lstStyle/>
-                    <a:p>
-                      <a:pPr>
-                        <a:buNone/>
-                      </a:pPr>
-                      <a:r>
-                        <a:rPr lang="en-US" sz="1600" dirty="0"/>
-                        <a:t>Write a list of strings</a:t>
-                      </a:r>
-                    </a:p>
-                  </a:txBody>
-                  <a:tcPr marL="54069" marR="54069" marT="41840" marB="41840" anchor="ctr">
-                    <a:lnL>
-                      <a:noFill/>
-                    </a:lnL>
-                    <a:lnR>
-                      <a:noFill/>
-                    </a:lnR>
-                    <a:lnT>
-                      <a:noFill/>
-                    </a:lnT>
-                    <a:lnB>
-                      <a:noFill/>
-                    </a:lnB>
-                    <a:noFill/>
-                  </a:tcPr>
-                </a:tc>
-                <a:extLst>
-                  <a:ext uri="{0D108BD9-81ED-4DB2-BD59-A6C34878D82A}">
-                    <a16:rowId xmlns:a16="http://schemas.microsoft.com/office/drawing/2014/main" val="4183087875"/>
-                  </a:ext>
-                </a:extLst>
-              </a:tr>
-            </a:tbl>
-          </a:graphicData>
-        </a:graphic>
-      </p:graphicFrame>
-    </p:spTree>
-    <p:extLst>
-      <p:ext uri="{BB962C8B-B14F-4D97-AF65-F5344CB8AC3E}">
-        <p14:creationId xmlns:p14="http://schemas.microsoft.com/office/powerpoint/2010/main" val="2222337207"/>
-      </p:ext>
-    </p:extLst>
-  </p:cSld>
-  <p:clrMapOvr>
-    <a:masterClrMapping/>
-  </p:clrMapOvr>
-</p:sld>
-</file>
-
-<file path=ppt/slides/slide24.xml><?xml version="1.0" encoding="utf-8"?>
-<p:sld xmlns:a="http://schemas.openxmlformats.org/drawingml/2006/main" xmlns:r="http://schemas.openxmlformats.org/officeDocument/2006/relationships" xmlns:p="http://schemas.openxmlformats.org/presentationml/2006/main">
-  <p:cSld>
-    <p:spTree>
-      <p:nvGrpSpPr>
-        <p:cNvPr id="1" name=""/>
-        <p:cNvGrpSpPr/>
-        <p:nvPr/>
-      </p:nvGrpSpPr>
-      <p:grpSpPr>
-        <a:xfrm>
-          <a:off x="0" y="0"/>
-          <a:ext cx="0" cy="0"/>
-          <a:chOff x="0" y="0"/>
-          <a:chExt cx="0" cy="0"/>
-        </a:xfrm>
-      </p:grpSpPr>
-      <p:sp>
-        <p:nvSpPr>
-          <p:cNvPr id="2" name="Title 1">
-            <a:extLst>
-              <a:ext uri="{FF2B5EF4-FFF2-40B4-BE49-F238E27FC236}">
-                <a16:creationId xmlns:a16="http://schemas.microsoft.com/office/drawing/2014/main" id="{43DC732B-C0CE-A8CC-4FEF-491CF35AB684}"/>
-              </a:ext>
-            </a:extLst>
-          </p:cNvPr>
-          <p:cNvSpPr>
-            <a:spLocks noGrp="1"/>
-          </p:cNvSpPr>
-          <p:nvPr>
-            <p:ph type="title"/>
-          </p:nvPr>
-        </p:nvSpPr>
-        <p:spPr/>
-        <p:txBody>
-          <a:bodyPr/>
-          <a:lstStyle/>
-          <a:p>
-            <a:r>
-              <a:rPr lang="en-US" dirty="0"/>
-              <a:t>A word about context managers</a:t>
-            </a:r>
-          </a:p>
-        </p:txBody>
-      </p:sp>
-      <p:pic>
-        <p:nvPicPr>
-          <p:cNvPr id="7" name="Content Placeholder 6">
-            <a:extLst>
-              <a:ext uri="{FF2B5EF4-FFF2-40B4-BE49-F238E27FC236}">
-                <a16:creationId xmlns:a16="http://schemas.microsoft.com/office/drawing/2014/main" id="{60CE308F-920C-D8CC-CD6B-88212B274861}"/>
-              </a:ext>
-            </a:extLst>
-          </p:cNvPr>
-          <p:cNvPicPr>
-            <a:picLocks noGrp="1" noChangeAspect="1"/>
-          </p:cNvPicPr>
-          <p:nvPr>
-            <p:ph sz="half" idx="4294967295"/>
-          </p:nvPr>
-        </p:nvPicPr>
-        <p:blipFill>
-          <a:blip r:embed="rId3"/>
-          <a:stretch>
-            <a:fillRect/>
-          </a:stretch>
-        </p:blipFill>
-        <p:spPr>
-          <a:xfrm>
-            <a:off x="191386" y="1600518"/>
-            <a:ext cx="7738252" cy="1401135"/>
-          </a:xfrm>
-        </p:spPr>
-      </p:pic>
-      <p:pic>
-        <p:nvPicPr>
-          <p:cNvPr id="9" name="Content Placeholder 8">
-            <a:extLst>
-              <a:ext uri="{FF2B5EF4-FFF2-40B4-BE49-F238E27FC236}">
-                <a16:creationId xmlns:a16="http://schemas.microsoft.com/office/drawing/2014/main" id="{AE1785C3-B737-6AE0-022D-86EB020BB4A4}"/>
-              </a:ext>
-            </a:extLst>
-          </p:cNvPr>
-          <p:cNvPicPr>
-            <a:picLocks noGrp="1" noChangeAspect="1"/>
-          </p:cNvPicPr>
-          <p:nvPr>
-            <p:ph sz="half" idx="4294967295"/>
-          </p:nvPr>
-        </p:nvPicPr>
-        <p:blipFill>
-          <a:blip r:embed="rId4"/>
-          <a:stretch>
-            <a:fillRect/>
-          </a:stretch>
-        </p:blipFill>
-        <p:spPr>
-          <a:xfrm>
-            <a:off x="191386" y="3910530"/>
-            <a:ext cx="8406804" cy="1401134"/>
-          </a:xfrm>
-        </p:spPr>
-      </p:pic>
-    </p:spTree>
-    <p:extLst>
-      <p:ext uri="{BB962C8B-B14F-4D97-AF65-F5344CB8AC3E}">
-        <p14:creationId xmlns:p14="http://schemas.microsoft.com/office/powerpoint/2010/main" val="2612667368"/>
-      </p:ext>
-    </p:extLst>
-  </p:cSld>
-  <p:clrMapOvr>
-    <a:masterClrMapping/>
-  </p:clrMapOvr>
-</p:sld>
-</file>
-
-<file path=ppt/slides/slide25.xml><?xml version="1.0" encoding="utf-8"?>
-<p:sld xmlns:a="http://schemas.openxmlformats.org/drawingml/2006/main" xmlns:r="http://schemas.openxmlformats.org/officeDocument/2006/relationships" xmlns:p="http://schemas.openxmlformats.org/presentationml/2006/main">
-  <p:cSld>
-    <p:spTree>
-      <p:nvGrpSpPr>
-        <p:cNvPr id="1" name=""/>
-        <p:cNvGrpSpPr/>
-        <p:nvPr/>
-      </p:nvGrpSpPr>
-      <p:grpSpPr>
-        <a:xfrm>
-          <a:off x="0" y="0"/>
-          <a:ext cx="0" cy="0"/>
-          <a:chOff x="0" y="0"/>
-          <a:chExt cx="0" cy="0"/>
-        </a:xfrm>
-      </p:grpSpPr>
-      <p:sp>
-        <p:nvSpPr>
-          <p:cNvPr id="5" name="Title 4">
-            <a:extLst>
-              <a:ext uri="{FF2B5EF4-FFF2-40B4-BE49-F238E27FC236}">
-                <a16:creationId xmlns:a16="http://schemas.microsoft.com/office/drawing/2014/main" id="{CF48DEDE-6A36-9908-9DD1-7ACF621226A8}"/>
-              </a:ext>
-            </a:extLst>
-          </p:cNvPr>
-          <p:cNvSpPr>
-            <a:spLocks noGrp="1"/>
-          </p:cNvSpPr>
-          <p:nvPr>
-            <p:ph type="title"/>
-          </p:nvPr>
-        </p:nvSpPr>
-        <p:spPr/>
-        <p:txBody>
-          <a:bodyPr/>
-          <a:lstStyle/>
-          <a:p>
-            <a:r>
-              <a:rPr lang="en-US" dirty="0"/>
-              <a:t>Another word…</a:t>
-            </a:r>
-          </a:p>
-        </p:txBody>
-      </p:sp>
-      <p:pic>
-        <p:nvPicPr>
-          <p:cNvPr id="8" name="Content Placeholder 7">
-            <a:extLst>
-              <a:ext uri="{FF2B5EF4-FFF2-40B4-BE49-F238E27FC236}">
-                <a16:creationId xmlns:a16="http://schemas.microsoft.com/office/drawing/2014/main" id="{E9459C75-8E15-77A8-710F-D2EEC8AB06C9}"/>
-              </a:ext>
-            </a:extLst>
-          </p:cNvPr>
-          <p:cNvPicPr>
-            <a:picLocks noGrp="1" noChangeAspect="1"/>
-          </p:cNvPicPr>
-          <p:nvPr>
-            <p:ph idx="4294967295"/>
-          </p:nvPr>
-        </p:nvPicPr>
-        <p:blipFill>
-          <a:blip r:embed="rId2"/>
-          <a:stretch>
-            <a:fillRect/>
-          </a:stretch>
-        </p:blipFill>
-        <p:spPr>
-          <a:xfrm>
-            <a:off x="333153" y="1383933"/>
-            <a:ext cx="11015321" cy="1189037"/>
-          </a:xfrm>
-        </p:spPr>
-      </p:pic>
-    </p:spTree>
-    <p:extLst>
-      <p:ext uri="{BB962C8B-B14F-4D97-AF65-F5344CB8AC3E}">
-        <p14:creationId xmlns:p14="http://schemas.microsoft.com/office/powerpoint/2010/main" val="3021022701"/>
-      </p:ext>
-    </p:extLst>
-  </p:cSld>
-  <p:clrMapOvr>
-    <a:masterClrMapping/>
-  </p:clrMapOvr>
-</p:sld>
-</file>
-
-<file path=ppt/slides/slide26.xml><?xml version="1.0" encoding="utf-8"?>
-<p:sld xmlns:a="http://schemas.openxmlformats.org/drawingml/2006/main" xmlns:r="http://schemas.openxmlformats.org/officeDocument/2006/relationships" xmlns:p="http://schemas.openxmlformats.org/presentationml/2006/main">
-  <p:cSld>
-    <p:spTree>
-      <p:nvGrpSpPr>
-        <p:cNvPr id="1" name=""/>
-        <p:cNvGrpSpPr/>
-        <p:nvPr/>
-      </p:nvGrpSpPr>
-      <p:grpSpPr>
-        <a:xfrm>
-          <a:off x="0" y="0"/>
-          <a:ext cx="0" cy="0"/>
-          <a:chOff x="0" y="0"/>
-          <a:chExt cx="0" cy="0"/>
-        </a:xfrm>
-      </p:grpSpPr>
-      <p:sp>
-        <p:nvSpPr>
-          <p:cNvPr id="5" name="Title 4">
-            <a:extLst>
-              <a:ext uri="{FF2B5EF4-FFF2-40B4-BE49-F238E27FC236}">
-                <a16:creationId xmlns:a16="http://schemas.microsoft.com/office/drawing/2014/main" id="{3B703F05-852F-AE03-891C-5F619074CC0A}"/>
-              </a:ext>
-            </a:extLst>
-          </p:cNvPr>
-          <p:cNvSpPr>
-            <a:spLocks noGrp="1"/>
-          </p:cNvSpPr>
-          <p:nvPr>
-            <p:ph type="title"/>
-          </p:nvPr>
-        </p:nvSpPr>
-        <p:spPr/>
-        <p:txBody>
-          <a:bodyPr/>
-          <a:lstStyle/>
-          <a:p>
-            <a:r>
-              <a:rPr lang="en-US" dirty="0"/>
-              <a:t>Hands-On #2</a:t>
-            </a:r>
-          </a:p>
-        </p:txBody>
-      </p:sp>
-      <p:sp>
-        <p:nvSpPr>
-          <p:cNvPr id="6" name="Content Placeholder 5">
-            <a:extLst>
-              <a:ext uri="{FF2B5EF4-FFF2-40B4-BE49-F238E27FC236}">
-                <a16:creationId xmlns:a16="http://schemas.microsoft.com/office/drawing/2014/main" id="{7CC8BCFF-F88D-9947-8910-B16FF4E68C8D}"/>
-              </a:ext>
-            </a:extLst>
-          </p:cNvPr>
-          <p:cNvSpPr>
-            <a:spLocks noGrp="1"/>
-          </p:cNvSpPr>
-          <p:nvPr>
-            <p:ph type="body" sz="quarter" idx="11"/>
-          </p:nvPr>
-        </p:nvSpPr>
-        <p:spPr/>
-        <p:txBody>
-          <a:bodyPr/>
-          <a:lstStyle/>
-          <a:p>
-            <a:r>
-              <a:rPr lang="en-US" dirty="0"/>
-              <a:t>Manipulate files in python</a:t>
-            </a:r>
-          </a:p>
-        </p:txBody>
-      </p:sp>
-    </p:spTree>
-    <p:extLst>
-      <p:ext uri="{BB962C8B-B14F-4D97-AF65-F5344CB8AC3E}">
-        <p14:creationId xmlns:p14="http://schemas.microsoft.com/office/powerpoint/2010/main" val="863485874"/>
-      </p:ext>
-    </p:extLst>
-  </p:cSld>
-  <p:clrMapOvr>
-    <a:masterClrMapping/>
-  </p:clrMapOvr>
-</p:sld>
-</file>
-
-<file path=ppt/slides/slide27.xml><?xml version="1.0" encoding="utf-8"?>
+<file path=ppt/slides/slide28.xml><?xml version="1.0" encoding="utf-8"?>
 <p:sld xmlns:a="http://schemas.openxmlformats.org/drawingml/2006/main" xmlns:r="http://schemas.openxmlformats.org/officeDocument/2006/relationships" xmlns:p="http://schemas.openxmlformats.org/presentationml/2006/main">
   <p:cSld>
     <p:spTree>
@@ -54879,19 +54813,17 @@
       </p:sp>
       <p:pic>
         <p:nvPicPr>
-          <p:cNvPr id="7" name="Content Placeholder 6">
-            <a:extLst>
-              <a:ext uri="{FF2B5EF4-FFF2-40B4-BE49-F238E27FC236}">
-                <a16:creationId xmlns:a16="http://schemas.microsoft.com/office/drawing/2014/main" id="{D6C03BA8-C242-A7E3-06B9-2FDDD142A3E2}"/>
+          <p:cNvPr id="10" name="Picture 9">
+            <a:extLst>
+              <a:ext uri="{FF2B5EF4-FFF2-40B4-BE49-F238E27FC236}">
+                <a16:creationId xmlns:a16="http://schemas.microsoft.com/office/drawing/2014/main" id="{A720FF54-D8D5-9857-54B4-32F100CAD807}"/>
               </a:ext>
             </a:extLst>
           </p:cNvPr>
           <p:cNvPicPr>
-            <a:picLocks noGrp="1" noChangeAspect="1"/>
+            <a:picLocks noChangeAspect="1"/>
           </p:cNvPicPr>
-          <p:nvPr>
-            <p:ph idx="1"/>
-          </p:nvPr>
+          <p:nvPr/>
         </p:nvPicPr>
         <p:blipFill>
           <a:blip r:embed="rId3"/>
@@ -54901,16 +54833,12 @@
         </p:blipFill>
         <p:spPr>
           <a:xfrm>
-            <a:off x="508000" y="1318800"/>
-            <a:ext cx="11176000" cy="4955141"/>
+            <a:off x="548640" y="1325881"/>
+            <a:ext cx="11486063" cy="4872875"/>
           </a:xfrm>
           <a:prstGeom prst="rect">
             <a:avLst/>
           </a:prstGeom>
-          <a:noFill/>
-          <a:ln>
-            <a:noFill/>
-          </a:ln>
         </p:spPr>
       </p:pic>
       <p:sp>
@@ -54927,7 +54855,7 @@
         </p:nvSpPr>
         <p:spPr>
           <a:xfrm>
-            <a:off x="159744" y="3000396"/>
+            <a:off x="409122" y="3189098"/>
             <a:ext cx="6284332" cy="307277"/>
           </a:xfrm>
           <a:prstGeom prst="rect">
